--- a/docs/presentations/v3/00-orientation.pptx
+++ b/docs/presentations/v3/00-orientation.pptx
@@ -1767,24 +1767,22 @@
       </p:grpSpPr>
       <p:pic>
         <p:nvPicPr>
-          <p:cNvPr id="2" name="Image 0" descr="/tmp/claude-0/-home-user-BasicRobotLessons/2acb544a-cfde-5b39-af16-8514142d362c/scratchpad/slides/v3-lesson0/assets/robot_white.png">    </p:cNvPr>
+          <p:cNvPr id="2" name="Image 0" descr="/home/user/BasicRobotLessons/docs/presentations/v3/template/assets/logo/team5010-logo.png">    </p:cNvPr>
           <p:cNvPicPr>
             <a:picLocks noChangeAspect="1"/>
           </p:cNvPicPr>
           <p:nvPr/>
         </p:nvPicPr>
         <p:blipFill>
-          <a:blip r:embed="rId1">
-            <a:alphaModFix amt="22000"/>
-          </a:blip>
+          <a:blip r:embed="rId1"/>
           <a:stretch>
             <a:fillRect/>
           </a:stretch>
         </p:blipFill>
         <p:spPr>
           <a:xfrm>
-            <a:off x="9418320" y="4160520"/>
-            <a:ext cx="2194560" cy="2194560"/>
+            <a:off x="8351215" y="3834811"/>
+            <a:ext cx="3291840" cy="2565989"/>
           </a:xfrm>
           <a:prstGeom prst="rect">
             <a:avLst/>
@@ -1980,7 +1978,7 @@
                 <a:ea typeface="Calibri" pitchFamily="34" charset="-122"/>
                 <a:cs typeface="Calibri" pitchFamily="34" charset="-120"/>
               </a:rPr>
-              <a:t>OpMode Track  ·  WPILib 2027 Alpha  ·  Commands V3</a:t>
+              <a:t>WPILib 2027 Alpha  ·  Commands V3</a:t>
             </a:r>
             <a:endParaRPr lang="en-US" sz="2000" dirty="0"/>
           </a:p>
@@ -2040,7 +2038,7 @@
       </p:sp>
       <p:pic>
         <p:nvPicPr>
-          <p:cNvPr id="3" name="Image 0" descr="/tmp/claude-0/-home-user-BasicRobotLessons/2acb544a-cfde-5b39-af16-8514142d362c/scratchpad/slides/v3-lesson0/assets/clipboardcheck_white.png">    </p:cNvPr>
+          <p:cNvPr id="3" name="Image 0" descr="/home/user/BasicRobotLessons/docs/presentations/v3/template/assets/icons/clipboardcheck_white.png">    </p:cNvPr>
           <p:cNvPicPr>
             <a:picLocks noChangeAspect="1"/>
           </p:cNvPicPr>
@@ -2071,7 +2069,7 @@
         <p:spPr>
           <a:xfrm>
             <a:off x="1389888" y="402336"/>
-            <a:ext cx="7315200" cy="365760"/>
+            <a:ext cx="9144000" cy="365760"/>
           </a:xfrm>
           <a:prstGeom prst="rect">
             <a:avLst/>
@@ -2109,8 +2107,8 @@
         </p:nvSpPr>
         <p:spPr>
           <a:xfrm>
-            <a:off x="1371600" y="786384"/>
-            <a:ext cx="9144000" cy="594360"/>
+            <a:off x="1371600" y="749808"/>
+            <a:ext cx="9418320" cy="594360"/>
           </a:xfrm>
           <a:prstGeom prst="rect">
             <a:avLst/>
@@ -2191,7 +2189,7 @@
         <p:spPr>
           <a:xfrm>
             <a:off x="640080" y="2240280"/>
-            <a:ext cx="5257800" cy="3794760"/>
+            <a:ext cx="5303520" cy="3794760"/>
           </a:xfrm>
           <a:prstGeom prst="roundRect">
             <a:avLst>
@@ -2212,8 +2210,8 @@
         </p:nvSpPr>
         <p:spPr>
           <a:xfrm>
-            <a:off x="960120" y="2560320"/>
-            <a:ext cx="548640" cy="548640"/>
+            <a:off x="960120" y="2514600"/>
+            <a:ext cx="502920" cy="502920"/>
           </a:xfrm>
           <a:prstGeom prst="ellipse">
             <a:avLst/>
@@ -2232,8 +2230,8 @@
         </p:nvSpPr>
         <p:spPr>
           <a:xfrm>
-            <a:off x="960120" y="2560320"/>
-            <a:ext cx="548640" cy="548640"/>
+            <a:off x="960120" y="2514600"/>
+            <a:ext cx="502920" cy="502920"/>
           </a:xfrm>
           <a:prstGeom prst="rect">
             <a:avLst/>
@@ -2271,8 +2269,8 @@
         </p:nvSpPr>
         <p:spPr>
           <a:xfrm>
-            <a:off x="960120" y="3337560"/>
-            <a:ext cx="4617720" cy="822960"/>
+            <a:off x="960120" y="3200400"/>
+            <a:ext cx="4663440" cy="731520"/>
           </a:xfrm>
           <a:prstGeom prst="rect">
             <a:avLst/>
@@ -2291,7 +2289,7 @@
               <a:buNone/>
             </a:pPr>
             <a:r>
-              <a:rPr lang="en-US" sz="2200" b="1" dirty="0">
+              <a:rPr lang="en-US" sz="2100" b="1" dirty="0">
                 <a:solidFill>
                   <a:srgbClr val="FFFFFF"/>
                 </a:solidFill>
@@ -2301,7 +2299,7 @@
               </a:rPr>
               <a:t>Give MyAuto a start()</a:t>
             </a:r>
-            <a:endParaRPr lang="en-US" sz="2200" dirty="0"/>
+            <a:endParaRPr lang="en-US" sz="2100" dirty="0"/>
           </a:p>
         </p:txBody>
       </p:sp>
@@ -2313,8 +2311,8 @@
         </p:nvSpPr>
         <p:spPr>
           <a:xfrm>
-            <a:off x="960120" y="4206240"/>
-            <a:ext cx="4617720" cy="1737360"/>
+            <a:off x="960120" y="3977640"/>
+            <a:ext cx="4663440" cy="1965960"/>
           </a:xfrm>
           <a:prstGeom prst="rect">
             <a:avLst/>
@@ -2328,7 +2326,7 @@
           <a:p>
             <a:pPr indent="0" marL="0">
               <a:lnSpc>
-                <a:spcPct val="125000"/>
+                <a:spcPct val="120000"/>
               </a:lnSpc>
               <a:buNone/>
             </a:pPr>
@@ -2355,8 +2353,8 @@
         </p:nvSpPr>
         <p:spPr>
           <a:xfrm>
-            <a:off x="6126480" y="2240280"/>
-            <a:ext cx="5257800" cy="3794760"/>
+            <a:off x="6217920" y="2240280"/>
+            <a:ext cx="5303520" cy="3794760"/>
           </a:xfrm>
           <a:prstGeom prst="roundRect">
             <a:avLst>
@@ -2377,8 +2375,8 @@
         </p:nvSpPr>
         <p:spPr>
           <a:xfrm>
-            <a:off x="6446520" y="2560320"/>
-            <a:ext cx="548640" cy="548640"/>
+            <a:off x="6537960" y="2514600"/>
+            <a:ext cx="502920" cy="502920"/>
           </a:xfrm>
           <a:prstGeom prst="ellipse">
             <a:avLst/>
@@ -2397,8 +2395,8 @@
         </p:nvSpPr>
         <p:spPr>
           <a:xfrm>
-            <a:off x="6446520" y="2560320"/>
-            <a:ext cx="548640" cy="548640"/>
+            <a:off x="6537960" y="2514600"/>
+            <a:ext cx="502920" cy="502920"/>
           </a:xfrm>
           <a:prstGeom prst="rect">
             <a:avLst/>
@@ -2436,8 +2434,8 @@
         </p:nvSpPr>
         <p:spPr>
           <a:xfrm>
-            <a:off x="6446520" y="3337560"/>
-            <a:ext cx="4617720" cy="822960"/>
+            <a:off x="6537960" y="3200400"/>
+            <a:ext cx="4663440" cy="731520"/>
           </a:xfrm>
           <a:prstGeom prst="rect">
             <a:avLst/>
@@ -2456,7 +2454,7 @@
               <a:buNone/>
             </a:pPr>
             <a:r>
-              <a:rPr lang="en-US" sz="2200" b="1" dirty="0">
+              <a:rPr lang="en-US" sz="2100" b="1" dirty="0">
                 <a:solidFill>
                   <a:srgbClr val="FFFFFF"/>
                 </a:solidFill>
@@ -2466,7 +2464,7 @@
               </a:rPr>
               <a:t>Break it on purpose</a:t>
             </a:r>
-            <a:endParaRPr lang="en-US" sz="2200" dirty="0"/>
+            <a:endParaRPr lang="en-US" sz="2100" dirty="0"/>
           </a:p>
         </p:txBody>
       </p:sp>
@@ -2478,8 +2476,8 @@
         </p:nvSpPr>
         <p:spPr>
           <a:xfrm>
-            <a:off x="6446520" y="4206240"/>
-            <a:ext cx="4617720" cy="1737360"/>
+            <a:off x="6537960" y="3977640"/>
+            <a:ext cx="4663440" cy="1965960"/>
           </a:xfrm>
           <a:prstGeom prst="rect">
             <a:avLst/>
@@ -2493,7 +2491,7 @@
           <a:p>
             <a:pPr indent="0" marL="0">
               <a:lnSpc>
-                <a:spcPct val="125000"/>
+                <a:spcPct val="120000"/>
               </a:lnSpc>
               <a:buNone/>
             </a:pPr>
@@ -2521,7 +2519,7 @@
         <p:spPr>
           <a:xfrm>
             <a:off x="640080" y="6446520"/>
-            <a:ext cx="7315200" cy="365760"/>
+            <a:ext cx="8229600" cy="365760"/>
           </a:xfrm>
           <a:prstGeom prst="rect">
             <a:avLst/>
@@ -2545,7 +2543,7 @@
                 <a:ea typeface="Calibri" pitchFamily="34" charset="-122"/>
                 <a:cs typeface="Calibri" pitchFamily="34" charset="-120"/>
               </a:rPr>
-              <a:t>LESSON 0 · ORIENTATION · OPMODE TRACK</a:t>
+              <a:t>LEARN JAVA + ROBOT PROGRAMMING · ORIENTATION</a:t>
             </a:r>
             <a:endParaRPr lang="en-US" sz="2000" dirty="0"/>
           </a:p>
@@ -2590,6 +2588,30 @@
           </a:p>
         </p:txBody>
       </p:sp>
+      <p:pic>
+        <p:nvPicPr>
+          <p:cNvPr id="19" name="Image 1" descr="/home/user/BasicRobotLessons/docs/presentations/v3/template/assets/logo/team5010-logo.png">    </p:cNvPr>
+          <p:cNvPicPr>
+            <a:picLocks noChangeAspect="1"/>
+          </p:cNvPicPr>
+          <p:nvPr/>
+        </p:nvPicPr>
+        <p:blipFill>
+          <a:blip r:embed="rId2"/>
+          <a:stretch>
+            <a:fillRect/>
+          </a:stretch>
+        </p:blipFill>
+        <p:spPr>
+          <a:xfrm>
+            <a:off x="10957255" y="164592"/>
+            <a:ext cx="777240" cy="605859"/>
+          </a:xfrm>
+          <a:prstGeom prst="rect">
+            <a:avLst/>
+          </a:prstGeom>
+        </p:spPr>
+      </p:pic>
     </p:spTree>
   </p:cSld>
   <p:clrMapOvr>
@@ -2644,7 +2666,7 @@
       </p:sp>
       <p:pic>
         <p:nvPicPr>
-          <p:cNvPr id="3" name="Image 0" descr="/tmp/claude-0/-home-user-BasicRobotLessons/2acb544a-cfde-5b39-af16-8514142d362c/scratchpad/slides/v3-lesson0/assets/graduationcap_white.png">    </p:cNvPr>
+          <p:cNvPr id="3" name="Image 0" descr="/home/user/BasicRobotLessons/docs/presentations/v3/template/assets/icons/graduationcap_white.png">    </p:cNvPr>
           <p:cNvPicPr>
             <a:picLocks noChangeAspect="1"/>
           </p:cNvPicPr>
@@ -2714,7 +2736,7 @@
         <p:spPr>
           <a:xfrm>
             <a:off x="1371600" y="749808"/>
-            <a:ext cx="10058400" cy="594360"/>
+            <a:ext cx="9418320" cy="594360"/>
           </a:xfrm>
           <a:prstGeom prst="rect">
             <a:avLst/>
@@ -2784,7 +2806,7 @@
                 <a:ea typeface="Calibri" pitchFamily="34" charset="-122"/>
                 <a:cs typeface="Calibri" pitchFamily="34" charset="-120"/>
               </a:rPr>
-              <a:t>Classes live in packages, same as always.</a:t>
+              <a:t>Every class lives inside a package.</a:t>
             </a:r>
             <a:endParaRPr lang="en-US" sz="2100" dirty="0"/>
           </a:p>
@@ -2832,7 +2854,7 @@
                 <a:ea typeface="Calibri" pitchFamily="34" charset="-122"/>
                 <a:cs typeface="Calibri" pitchFamily="34" charset="-120"/>
               </a:rPr>
-              <a:t>Whichever opmode is picked, its periodic() ticks ~50 times a second — that's still the heartbeat.</a:t>
+              <a:t>Whichever opmode is picked, its periodic() ticks ~50 times a second — that's the heartbeat.</a:t>
             </a:r>
             <a:endParaRPr lang="en-US" sz="2100" dirty="0"/>
           </a:p>
@@ -2874,7 +2896,7 @@
                 <a:ea typeface="Cambria" pitchFamily="34" charset="-122"/>
                 <a:cs typeface="Cambria" pitchFamily="34" charset="-120"/>
               </a:rPr>
-              <a:t>Which code the heartbeat drives is now a runtime choice, not baked into one class.</a:t>
+              <a:t>Picking an opmode is what decides which code the heartbeat drives.</a:t>
             </a:r>
             <a:endParaRPr lang="en-US" sz="2000" dirty="0"/>
           </a:p>
@@ -3083,7 +3105,7 @@
       </p:sp>
       <p:pic>
         <p:nvPicPr>
-          <p:cNvPr id="14" name="Image 1" descr="/tmp/claude-0/-home-user-BasicRobotLessons/2acb544a-cfde-5b39-af16-8514142d362c/scratchpad/slides/v3-lesson0/assets/arrowright_white.png">    </p:cNvPr>
+          <p:cNvPr id="14" name="Image 1" descr="/home/user/BasicRobotLessons/docs/presentations/v3/template/assets/icons/arrowright_white.png">    </p:cNvPr>
           <p:cNvPicPr>
             <a:picLocks noChangeAspect="1"/>
           </p:cNvPicPr>
@@ -3114,7 +3136,7 @@
         <p:spPr>
           <a:xfrm>
             <a:off x="640080" y="6446520"/>
-            <a:ext cx="7315200" cy="365760"/>
+            <a:ext cx="8229600" cy="365760"/>
           </a:xfrm>
           <a:prstGeom prst="rect">
             <a:avLst/>
@@ -3138,7 +3160,7 @@
                 <a:ea typeface="Calibri" pitchFamily="34" charset="-122"/>
                 <a:cs typeface="Calibri" pitchFamily="34" charset="-120"/>
               </a:rPr>
-              <a:t>LESSON 0 · ORIENTATION · OPMODE TRACK</a:t>
+              <a:t>LEARN JAVA + ROBOT PROGRAMMING · ORIENTATION</a:t>
             </a:r>
             <a:endParaRPr lang="en-US" sz="2000" dirty="0"/>
           </a:p>
@@ -3183,6 +3205,30 @@
           </a:p>
         </p:txBody>
       </p:sp>
+      <p:pic>
+        <p:nvPicPr>
+          <p:cNvPr id="17" name="Image 2" descr="/home/user/BasicRobotLessons/docs/presentations/v3/template/assets/logo/team5010-logo.png">    </p:cNvPr>
+          <p:cNvPicPr>
+            <a:picLocks noChangeAspect="1"/>
+          </p:cNvPicPr>
+          <p:nvPr/>
+        </p:nvPicPr>
+        <p:blipFill>
+          <a:blip r:embed="rId3"/>
+          <a:stretch>
+            <a:fillRect/>
+          </a:stretch>
+        </p:blipFill>
+        <p:spPr>
+          <a:xfrm>
+            <a:off x="10957255" y="164592"/>
+            <a:ext cx="777240" cy="605859"/>
+          </a:xfrm>
+          <a:prstGeom prst="rect">
+            <a:avLst/>
+          </a:prstGeom>
+        </p:spPr>
+      </p:pic>
     </p:spTree>
   </p:cSld>
   <p:clrMapOvr>
@@ -3237,7 +3283,7 @@
       </p:sp>
       <p:pic>
         <p:nvPicPr>
-          <p:cNvPr id="3" name="Image 0" descr="/tmp/claude-0/-home-user-BasicRobotLessons/2acb544a-cfde-5b39-af16-8514142d362c/scratchpad/slides/v3-lesson0/assets/bullseye_white.png">    </p:cNvPr>
+          <p:cNvPr id="3" name="Image 0" descr="/home/user/BasicRobotLessons/docs/presentations/v3/template/assets/icons/bullseye_white.png">    </p:cNvPr>
           <p:cNvPicPr>
             <a:picLocks noChangeAspect="1"/>
           </p:cNvPicPr>
@@ -3307,7 +3353,7 @@
         <p:spPr>
           <a:xfrm>
             <a:off x="1371600" y="749808"/>
-            <a:ext cx="10058400" cy="594360"/>
+            <a:ext cx="9418320" cy="594360"/>
           </a:xfrm>
           <a:prstGeom prst="rect">
             <a:avLst/>
@@ -3423,7 +3469,7 @@
       </p:sp>
       <p:pic>
         <p:nvPicPr>
-          <p:cNvPr id="9" name="Image 1" descr="/tmp/claude-0/-home-user-BasicRobotLessons/2acb544a-cfde-5b39-af16-8514142d362c/scratchpad/slides/v3-lesson0/assets/code_white.png">    </p:cNvPr>
+          <p:cNvPr id="9" name="Image 1" descr="/home/user/BasicRobotLessons/docs/presentations/v3/template/assets/icons/code_white.png">    </p:cNvPr>
           <p:cNvPicPr>
             <a:picLocks noChangeAspect="1"/>
           </p:cNvPicPr>
@@ -3624,7 +3670,7 @@
       </p:sp>
       <p:pic>
         <p:nvPicPr>
-          <p:cNvPr id="13" name="Image 2" descr="/tmp/claude-0/-home-user-BasicRobotLessons/2acb544a-cfde-5b39-af16-8514142d362c/scratchpad/slides/v3-lesson0/assets/robot_white.png">    </p:cNvPr>
+          <p:cNvPr id="13" name="Image 2" descr="/home/user/BasicRobotLessons/docs/presentations/v3/template/assets/icons/robot_white.png">    </p:cNvPr>
           <p:cNvPicPr>
             <a:picLocks noChangeAspect="1"/>
           </p:cNvPicPr>
@@ -3764,7 +3810,7 @@
         <p:spPr>
           <a:xfrm>
             <a:off x="640080" y="6446520"/>
-            <a:ext cx="7315200" cy="365760"/>
+            <a:ext cx="8229600" cy="365760"/>
           </a:xfrm>
           <a:prstGeom prst="rect">
             <a:avLst/>
@@ -3788,7 +3834,7 @@
                 <a:ea typeface="Calibri" pitchFamily="34" charset="-122"/>
                 <a:cs typeface="Calibri" pitchFamily="34" charset="-120"/>
               </a:rPr>
-              <a:t>LESSON 0 · ORIENTATION · OPMODE TRACK</a:t>
+              <a:t>LEARN JAVA + ROBOT PROGRAMMING · ORIENTATION</a:t>
             </a:r>
             <a:endParaRPr lang="en-US" sz="2000" dirty="0"/>
           </a:p>
@@ -3833,6 +3879,30 @@
           </a:p>
         </p:txBody>
       </p:sp>
+      <p:pic>
+        <p:nvPicPr>
+          <p:cNvPr id="18" name="Image 3" descr="/home/user/BasicRobotLessons/docs/presentations/v3/template/assets/logo/team5010-logo.png">    </p:cNvPr>
+          <p:cNvPicPr>
+            <a:picLocks noChangeAspect="1"/>
+          </p:cNvPicPr>
+          <p:nvPr/>
+        </p:nvPicPr>
+        <p:blipFill>
+          <a:blip r:embed="rId4"/>
+          <a:stretch>
+            <a:fillRect/>
+          </a:stretch>
+        </p:blipFill>
+        <p:spPr>
+          <a:xfrm>
+            <a:off x="10957255" y="164592"/>
+            <a:ext cx="777240" cy="605859"/>
+          </a:xfrm>
+          <a:prstGeom prst="rect">
+            <a:avLst/>
+          </a:prstGeom>
+        </p:spPr>
+      </p:pic>
     </p:spTree>
   </p:cSld>
   <p:clrMapOvr>
@@ -3887,7 +3957,7 @@
       </p:sp>
       <p:pic>
         <p:nvPicPr>
-          <p:cNvPr id="3" name="Image 0" descr="/tmp/claude-0/-home-user-BasicRobotLessons/2acb544a-cfde-5b39-af16-8514142d362c/scratchpad/slides/v3-lesson0/assets/cube_white.png">    </p:cNvPr>
+          <p:cNvPr id="3" name="Image 0" descr="/home/user/BasicRobotLessons/docs/presentations/v3/template/assets/icons/cube_white.png">    </p:cNvPr>
           <p:cNvPicPr>
             <a:picLocks noChangeAspect="1"/>
           </p:cNvPicPr>
@@ -3957,7 +4027,7 @@
         <p:spPr>
           <a:xfrm>
             <a:off x="1371600" y="749808"/>
-            <a:ext cx="10058400" cy="594360"/>
+            <a:ext cx="9418320" cy="594360"/>
           </a:xfrm>
           <a:prstGeom prst="rect">
             <a:avLst/>
@@ -4053,7 +4123,7 @@
       </p:sp>
       <p:pic>
         <p:nvPicPr>
-          <p:cNvPr id="8" name="Image 1" descr="/tmp/claude-0/-home-user-BasicRobotLessons/2acb544a-cfde-5b39-af16-8514142d362c/scratchpad/slides/v3-lesson0/assets/filecode_teal.png">    </p:cNvPr>
+          <p:cNvPr id="8" name="Image 1" descr="/home/user/BasicRobotLessons/docs/presentations/v3/template/assets/icons/filecode_teal.png">    </p:cNvPr>
           <p:cNvPicPr>
             <a:picLocks noChangeAspect="1"/>
           </p:cNvPicPr>
@@ -4180,7 +4250,7 @@
       </p:sp>
       <p:pic>
         <p:nvPicPr>
-          <p:cNvPr id="12" name="Image 2" descr="/tmp/claude-0/-home-user-BasicRobotLessons/2acb544a-cfde-5b39-af16-8514142d362c/scratchpad/slides/v3-lesson0/assets/filecode_teal.png">    </p:cNvPr>
+          <p:cNvPr id="12" name="Image 2" descr="/home/user/BasicRobotLessons/docs/presentations/v3/template/assets/icons/filecode_teal.png">    </p:cNvPr>
           <p:cNvPicPr>
             <a:picLocks noChangeAspect="1"/>
           </p:cNvPicPr>
@@ -4307,7 +4377,7 @@
       </p:sp>
       <p:pic>
         <p:nvPicPr>
-          <p:cNvPr id="16" name="Image 3" descr="/tmp/claude-0/-home-user-BasicRobotLessons/2acb544a-cfde-5b39-af16-8514142d362c/scratchpad/slides/v3-lesson0/assets/filecode_teal.png">    </p:cNvPr>
+          <p:cNvPr id="16" name="Image 3" descr="/home/user/BasicRobotLessons/docs/presentations/v3/template/assets/icons/filecode_teal.png">    </p:cNvPr>
           <p:cNvPicPr>
             <a:picLocks noChangeAspect="1"/>
           </p:cNvPicPr>
@@ -4434,7 +4504,7 @@
       </p:sp>
       <p:pic>
         <p:nvPicPr>
-          <p:cNvPr id="20" name="Image 4" descr="/tmp/claude-0/-home-user-BasicRobotLessons/2acb544a-cfde-5b39-af16-8514142d362c/scratchpad/slides/v3-lesson0/assets/filecode_teal.png">    </p:cNvPr>
+          <p:cNvPr id="20" name="Image 4" descr="/home/user/BasicRobotLessons/docs/presentations/v3/template/assets/icons/filecode_teal.png">    </p:cNvPr>
           <p:cNvPicPr>
             <a:picLocks noChangeAspect="1"/>
           </p:cNvPicPr>
@@ -4546,7 +4616,7 @@
         <p:spPr>
           <a:xfrm>
             <a:off x="640080" y="6446520"/>
-            <a:ext cx="7315200" cy="365760"/>
+            <a:ext cx="8229600" cy="365760"/>
           </a:xfrm>
           <a:prstGeom prst="rect">
             <a:avLst/>
@@ -4570,7 +4640,7 @@
                 <a:ea typeface="Calibri" pitchFamily="34" charset="-122"/>
                 <a:cs typeface="Calibri" pitchFamily="34" charset="-120"/>
               </a:rPr>
-              <a:t>LESSON 0 · ORIENTATION · OPMODE TRACK</a:t>
+              <a:t>LEARN JAVA + ROBOT PROGRAMMING · ORIENTATION</a:t>
             </a:r>
             <a:endParaRPr lang="en-US" sz="2000" dirty="0"/>
           </a:p>
@@ -4615,6 +4685,30 @@
           </a:p>
         </p:txBody>
       </p:sp>
+      <p:pic>
+        <p:nvPicPr>
+          <p:cNvPr id="25" name="Image 5" descr="/home/user/BasicRobotLessons/docs/presentations/v3/template/assets/logo/team5010-logo.png">    </p:cNvPr>
+          <p:cNvPicPr>
+            <a:picLocks noChangeAspect="1"/>
+          </p:cNvPicPr>
+          <p:nvPr/>
+        </p:nvPicPr>
+        <p:blipFill>
+          <a:blip r:embed="rId6"/>
+          <a:stretch>
+            <a:fillRect/>
+          </a:stretch>
+        </p:blipFill>
+        <p:spPr>
+          <a:xfrm>
+            <a:off x="10957255" y="164592"/>
+            <a:ext cx="777240" cy="605859"/>
+          </a:xfrm>
+          <a:prstGeom prst="rect">
+            <a:avLst/>
+          </a:prstGeom>
+        </p:spPr>
+      </p:pic>
     </p:spTree>
   </p:cSld>
   <p:clrMapOvr>
@@ -4669,7 +4763,7 @@
       </p:sp>
       <p:pic>
         <p:nvPicPr>
-          <p:cNvPr id="3" name="Image 0" descr="/tmp/claude-0/-home-user-BasicRobotLessons/2acb544a-cfde-5b39-af16-8514142d362c/scratchpad/slides/v3-lesson0/assets/cube_white.png">    </p:cNvPr>
+          <p:cNvPr id="3" name="Image 0" descr="/home/user/BasicRobotLessons/docs/presentations/v3/template/assets/icons/cube_white.png">    </p:cNvPr>
           <p:cNvPicPr>
             <a:picLocks noChangeAspect="1"/>
           </p:cNvPicPr>
@@ -4739,7 +4833,7 @@
         <p:spPr>
           <a:xfrm>
             <a:off x="1371600" y="749808"/>
-            <a:ext cx="10058400" cy="594360"/>
+            <a:ext cx="9418320" cy="594360"/>
           </a:xfrm>
           <a:prstGeom prst="rect">
             <a:avLst/>
@@ -4972,8 +5066,8 @@
         </p:nvSpPr>
         <p:spPr>
           <a:xfrm>
-            <a:off x="6446520" y="1828800"/>
-            <a:ext cx="4846320" cy="365760"/>
+            <a:off x="6446520" y="1874520"/>
+            <a:ext cx="4800600" cy="365760"/>
           </a:xfrm>
           <a:prstGeom prst="rect">
             <a:avLst/>
@@ -5011,8 +5105,8 @@
         </p:nvSpPr>
         <p:spPr>
           <a:xfrm>
-            <a:off x="6446520" y="2286000"/>
-            <a:ext cx="4846320" cy="1371600"/>
+            <a:off x="6446520" y="2331720"/>
+            <a:ext cx="4800600" cy="1371600"/>
           </a:xfrm>
           <a:prstGeom prst="rect">
             <a:avLst/>
@@ -5053,8 +5147,8 @@
         </p:nvSpPr>
         <p:spPr>
           <a:xfrm>
-            <a:off x="6446520" y="3794760"/>
-            <a:ext cx="4846320" cy="1965960"/>
+            <a:off x="6446520" y="3703320"/>
+            <a:ext cx="4800600" cy="1874520"/>
           </a:xfrm>
           <a:prstGeom prst="rect">
             <a:avLst/>
@@ -5096,7 +5190,7 @@
         <p:spPr>
           <a:xfrm>
             <a:off x="640080" y="6446520"/>
-            <a:ext cx="7315200" cy="365760"/>
+            <a:ext cx="8229600" cy="365760"/>
           </a:xfrm>
           <a:prstGeom prst="rect">
             <a:avLst/>
@@ -5120,7 +5214,7 @@
                 <a:ea typeface="Calibri" pitchFamily="34" charset="-122"/>
                 <a:cs typeface="Calibri" pitchFamily="34" charset="-120"/>
               </a:rPr>
-              <a:t>LESSON 0 · ORIENTATION · OPMODE TRACK</a:t>
+              <a:t>LEARN JAVA + ROBOT PROGRAMMING · ORIENTATION</a:t>
             </a:r>
             <a:endParaRPr lang="en-US" sz="2000" dirty="0"/>
           </a:p>
@@ -5165,6 +5259,30 @@
           </a:p>
         </p:txBody>
       </p:sp>
+      <p:pic>
+        <p:nvPicPr>
+          <p:cNvPr id="18" name="Image 1" descr="/home/user/BasicRobotLessons/docs/presentations/v3/template/assets/logo/team5010-logo.png">    </p:cNvPr>
+          <p:cNvPicPr>
+            <a:picLocks noChangeAspect="1"/>
+          </p:cNvPicPr>
+          <p:nvPr/>
+        </p:nvPicPr>
+        <p:blipFill>
+          <a:blip r:embed="rId2"/>
+          <a:stretch>
+            <a:fillRect/>
+          </a:stretch>
+        </p:blipFill>
+        <p:spPr>
+          <a:xfrm>
+            <a:off x="10957255" y="164592"/>
+            <a:ext cx="777240" cy="605859"/>
+          </a:xfrm>
+          <a:prstGeom prst="rect">
+            <a:avLst/>
+          </a:prstGeom>
+        </p:spPr>
+      </p:pic>
     </p:spTree>
   </p:cSld>
   <p:clrMapOvr>
@@ -5219,7 +5337,7 @@
       </p:sp>
       <p:pic>
         <p:nvPicPr>
-          <p:cNvPr id="3" name="Image 0" descr="/tmp/claude-0/-home-user-BasicRobotLessons/2acb544a-cfde-5b39-af16-8514142d362c/scratchpad/slides/v3-lesson0/assets/listul_white.png">    </p:cNvPr>
+          <p:cNvPr id="3" name="Image 0" descr="/home/user/BasicRobotLessons/docs/presentations/v3/template/assets/icons/listul_white.png">    </p:cNvPr>
           <p:cNvPicPr>
             <a:picLocks noChangeAspect="1"/>
           </p:cNvPicPr>
@@ -5289,7 +5407,7 @@
         <p:spPr>
           <a:xfrm>
             <a:off x="1371600" y="749808"/>
-            <a:ext cx="10058400" cy="594360"/>
+            <a:ext cx="9418320" cy="594360"/>
           </a:xfrm>
           <a:prstGeom prst="rect">
             <a:avLst/>
@@ -5629,8 +5747,8 @@
         </p:nvSpPr>
         <p:spPr>
           <a:xfrm>
-            <a:off x="6903720" y="1828800"/>
-            <a:ext cx="4389120" cy="365760"/>
+            <a:off x="6903720" y="1874520"/>
+            <a:ext cx="4343400" cy="365760"/>
           </a:xfrm>
           <a:prstGeom prst="rect">
             <a:avLst/>
@@ -5668,8 +5786,50 @@
         </p:nvSpPr>
         <p:spPr>
           <a:xfrm>
-            <a:off x="6903720" y="2240280"/>
-            <a:ext cx="4389120" cy="1554480"/>
+            <a:off x="6903720" y="2331720"/>
+            <a:ext cx="4343400" cy="1562100"/>
+          </a:xfrm>
+          <a:prstGeom prst="rect">
+            <a:avLst/>
+          </a:prstGeom>
+          <a:noFill/>
+          <a:ln/>
+        </p:spPr>
+        <p:txBody>
+          <a:bodyPr wrap="square" lIns="0" tIns="0" rIns="0" bIns="0" rtlCol="0" anchor="t"/>
+          <a:lstStyle/>
+          <a:p>
+            <a:pPr indent="0" marL="0">
+              <a:lnSpc>
+                <a:spcPct val="120000"/>
+              </a:lnSpc>
+              <a:buNone/>
+            </a:pPr>
+            <a:r>
+              <a:rPr lang="en-US" sz="2100" b="1" dirty="0">
+                <a:solidFill>
+                  <a:srgbClr val="13294B"/>
+                </a:solidFill>
+                <a:latin typeface="Cambria" pitchFamily="34" charset="0"/>
+                <a:ea typeface="Cambria" pitchFamily="34" charset="-122"/>
+                <a:cs typeface="Cambria" pitchFamily="34" charset="-120"/>
+              </a:rPr>
+              <a:t>start(), periodic(), end(), close(), disabledPeriodic() — five methods, all empty, each named for the moment it fires.</a:t>
+            </a:r>
+            <a:endParaRPr lang="en-US" sz="2100" dirty="0"/>
+          </a:p>
+        </p:txBody>
+      </p:sp>
+      <p:sp>
+        <p:nvSpPr>
+          <p:cNvPr id="14" name="Text 11"/>
+          <p:cNvSpPr/>
+          <p:nvPr/>
+        </p:nvSpPr>
+        <p:spPr>
+          <a:xfrm>
+            <a:off x="6903720" y="3893820"/>
+            <a:ext cx="4343400" cy="1684020"/>
           </a:xfrm>
           <a:prstGeom prst="rect">
             <a:avLst/>
@@ -5688,48 +5848,6 @@
               <a:buNone/>
             </a:pPr>
             <a:r>
-              <a:rPr lang="en-US" sz="2100" b="1" dirty="0">
-                <a:solidFill>
-                  <a:srgbClr val="13294B"/>
-                </a:solidFill>
-                <a:latin typeface="Cambria" pitchFamily="34" charset="0"/>
-                <a:ea typeface="Cambria" pitchFamily="34" charset="-122"/>
-                <a:cs typeface="Cambria" pitchFamily="34" charset="-120"/>
-              </a:rPr>
-              <a:t>start(), periodic(), end(), close(), disabledPeriodic() — five methods, all empty, each named for the moment it fires.</a:t>
-            </a:r>
-            <a:endParaRPr lang="en-US" sz="2100" dirty="0"/>
-          </a:p>
-        </p:txBody>
-      </p:sp>
-      <p:sp>
-        <p:nvSpPr>
-          <p:cNvPr id="14" name="Text 11"/>
-          <p:cNvSpPr/>
-          <p:nvPr/>
-        </p:nvSpPr>
-        <p:spPr>
-          <a:xfrm>
-            <a:off x="6903720" y="3840480"/>
-            <a:ext cx="4389120" cy="1828800"/>
-          </a:xfrm>
-          <a:prstGeom prst="rect">
-            <a:avLst/>
-          </a:prstGeom>
-          <a:noFill/>
-          <a:ln/>
-        </p:spPr>
-        <p:txBody>
-          <a:bodyPr wrap="square" lIns="0" tIns="0" rIns="0" bIns="0" rtlCol="0" anchor="t"/>
-          <a:lstStyle/>
-          <a:p>
-            <a:pPr indent="0" marL="0">
-              <a:lnSpc>
-                <a:spcPct val="130000"/>
-              </a:lnSpc>
-              <a:buNone/>
-            </a:pPr>
-            <a:r>
               <a:rPr lang="en-US" sz="2000" dirty="0">
                 <a:solidFill>
                   <a:srgbClr val="13294B"/>
@@ -5753,7 +5871,7 @@
         <p:spPr>
           <a:xfrm>
             <a:off x="640080" y="6446520"/>
-            <a:ext cx="7315200" cy="365760"/>
+            <a:ext cx="8229600" cy="365760"/>
           </a:xfrm>
           <a:prstGeom prst="rect">
             <a:avLst/>
@@ -5777,7 +5895,7 @@
                 <a:ea typeface="Calibri" pitchFamily="34" charset="-122"/>
                 <a:cs typeface="Calibri" pitchFamily="34" charset="-120"/>
               </a:rPr>
-              <a:t>LESSON 0 · ORIENTATION · OPMODE TRACK</a:t>
+              <a:t>LEARN JAVA + ROBOT PROGRAMMING · ORIENTATION</a:t>
             </a:r>
             <a:endParaRPr lang="en-US" sz="2000" dirty="0"/>
           </a:p>
@@ -5822,6 +5940,30 @@
           </a:p>
         </p:txBody>
       </p:sp>
+      <p:pic>
+        <p:nvPicPr>
+          <p:cNvPr id="17" name="Image 1" descr="/home/user/BasicRobotLessons/docs/presentations/v3/template/assets/logo/team5010-logo.png">    </p:cNvPr>
+          <p:cNvPicPr>
+            <a:picLocks noChangeAspect="1"/>
+          </p:cNvPicPr>
+          <p:nvPr/>
+        </p:nvPicPr>
+        <p:blipFill>
+          <a:blip r:embed="rId2"/>
+          <a:stretch>
+            <a:fillRect/>
+          </a:stretch>
+        </p:blipFill>
+        <p:spPr>
+          <a:xfrm>
+            <a:off x="10957255" y="164592"/>
+            <a:ext cx="777240" cy="605859"/>
+          </a:xfrm>
+          <a:prstGeom prst="rect">
+            <a:avLst/>
+          </a:prstGeom>
+        </p:spPr>
+      </p:pic>
     </p:spTree>
   </p:cSld>
   <p:clrMapOvr>
@@ -5876,7 +6018,7 @@
       </p:sp>
       <p:pic>
         <p:nvPicPr>
-          <p:cNvPr id="3" name="Image 0" descr="/tmp/claude-0/-home-user-BasicRobotLessons/2acb544a-cfde-5b39-af16-8514142d362c/scratchpad/slides/v3-lesson0/assets/tag_white.png">    </p:cNvPr>
+          <p:cNvPr id="3" name="Image 0" descr="/home/user/BasicRobotLessons/docs/presentations/v3/template/assets/icons/tag_white.png">    </p:cNvPr>
           <p:cNvPicPr>
             <a:picLocks noChangeAspect="1"/>
           </p:cNvPicPr>
@@ -5946,7 +6088,7 @@
         <p:spPr>
           <a:xfrm>
             <a:off x="1371600" y="749808"/>
-            <a:ext cx="10058400" cy="594360"/>
+            <a:ext cx="9418320" cy="594360"/>
           </a:xfrm>
           <a:prstGeom prst="rect">
             <a:avLst/>
@@ -6213,7 +6355,7 @@
       </p:sp>
       <p:pic>
         <p:nvPicPr>
-          <p:cNvPr id="13" name="Image 1" descr="/tmp/claude-0/-home-user-BasicRobotLessons/2acb544a-cfde-5b39-af16-8514142d362c/scratchpad/slides/v3-lesson0/assets/lightbulb_white.png">    </p:cNvPr>
+          <p:cNvPr id="13" name="Image 1" descr="/home/user/BasicRobotLessons/docs/presentations/v3/template/assets/icons/lightbulb_white.png">    </p:cNvPr>
           <p:cNvPicPr>
             <a:picLocks noChangeAspect="1"/>
           </p:cNvPicPr>
@@ -6367,7 +6509,7 @@
         <p:spPr>
           <a:xfrm>
             <a:off x="640080" y="6446520"/>
-            <a:ext cx="7315200" cy="365760"/>
+            <a:ext cx="8229600" cy="365760"/>
           </a:xfrm>
           <a:prstGeom prst="rect">
             <a:avLst/>
@@ -6391,7 +6533,7 @@
                 <a:ea typeface="Calibri" pitchFamily="34" charset="-122"/>
                 <a:cs typeface="Calibri" pitchFamily="34" charset="-120"/>
               </a:rPr>
-              <a:t>LESSON 0 · ORIENTATION · OPMODE TRACK</a:t>
+              <a:t>LEARN JAVA + ROBOT PROGRAMMING · ORIENTATION</a:t>
             </a:r>
             <a:endParaRPr lang="en-US" sz="2000" dirty="0"/>
           </a:p>
@@ -6436,6 +6578,30 @@
           </a:p>
         </p:txBody>
       </p:sp>
+      <p:pic>
+        <p:nvPicPr>
+          <p:cNvPr id="19" name="Image 2" descr="/home/user/BasicRobotLessons/docs/presentations/v3/template/assets/logo/team5010-logo.png">    </p:cNvPr>
+          <p:cNvPicPr>
+            <a:picLocks noChangeAspect="1"/>
+          </p:cNvPicPr>
+          <p:nvPr/>
+        </p:nvPicPr>
+        <p:blipFill>
+          <a:blip r:embed="rId3"/>
+          <a:stretch>
+            <a:fillRect/>
+          </a:stretch>
+        </p:blipFill>
+        <p:spPr>
+          <a:xfrm>
+            <a:off x="10957255" y="164592"/>
+            <a:ext cx="777240" cy="605859"/>
+          </a:xfrm>
+          <a:prstGeom prst="rect">
+            <a:avLst/>
+          </a:prstGeom>
+        </p:spPr>
+      </p:pic>
     </p:spTree>
   </p:cSld>
   <p:clrMapOvr>
@@ -6490,7 +6656,7 @@
       </p:sp>
       <p:pic>
         <p:nvPicPr>
-          <p:cNvPr id="3" name="Image 0" descr="/tmp/claude-0/-home-user-BasicRobotLessons/2acb544a-cfde-5b39-af16-8514142d362c/scratchpad/slides/v3-lesson0/assets/heartbeat_white.png">    </p:cNvPr>
+          <p:cNvPr id="3" name="Image 0" descr="/home/user/BasicRobotLessons/docs/presentations/v3/template/assets/icons/heartbeat_white.png">    </p:cNvPr>
           <p:cNvPicPr>
             <a:picLocks noChangeAspect="1"/>
           </p:cNvPicPr>
@@ -6559,8 +6725,8 @@
         </p:nvSpPr>
         <p:spPr>
           <a:xfrm>
-            <a:off x="1371600" y="786384"/>
-            <a:ext cx="10058400" cy="594360"/>
+            <a:off x="1371600" y="749808"/>
+            <a:ext cx="9418320" cy="594360"/>
           </a:xfrm>
           <a:prstGeom prst="rect">
             <a:avLst/>
@@ -6832,7 +6998,7 @@
                 <a:ea typeface="Calibri" pitchFamily="34" charset="-122"/>
                 <a:cs typeface="Calibri" pitchFamily="34" charset="-120"/>
               </a:rPr>
-              <a:t>One layer added: which piece of code the heartbeat drives is now a choice made at runtime — not baked into a single class.</a:t>
+              <a:t>Picking an opmode is what decides which code the heartbeat drives — that choice happens when you select one, not when you write its class.</a:t>
             </a:r>
             <a:endParaRPr lang="en-US" sz="2200" dirty="0"/>
           </a:p>
@@ -6847,7 +7013,7 @@
         <p:spPr>
           <a:xfrm>
             <a:off x="640080" y="6446520"/>
-            <a:ext cx="7315200" cy="365760"/>
+            <a:ext cx="8229600" cy="365760"/>
           </a:xfrm>
           <a:prstGeom prst="rect">
             <a:avLst/>
@@ -6871,7 +7037,7 @@
                 <a:ea typeface="Calibri" pitchFamily="34" charset="-122"/>
                 <a:cs typeface="Calibri" pitchFamily="34" charset="-120"/>
               </a:rPr>
-              <a:t>LESSON 0 · ORIENTATION · OPMODE TRACK</a:t>
+              <a:t>LEARN JAVA + ROBOT PROGRAMMING · ORIENTATION</a:t>
             </a:r>
             <a:endParaRPr lang="en-US" sz="2000" dirty="0"/>
           </a:p>
@@ -6916,6 +7082,30 @@
           </a:p>
         </p:txBody>
       </p:sp>
+      <p:pic>
+        <p:nvPicPr>
+          <p:cNvPr id="15" name="Image 1" descr="/home/user/BasicRobotLessons/docs/presentations/v3/template/assets/logo/team5010-logo.png">    </p:cNvPr>
+          <p:cNvPicPr>
+            <a:picLocks noChangeAspect="1"/>
+          </p:cNvPicPr>
+          <p:nvPr/>
+        </p:nvPicPr>
+        <p:blipFill>
+          <a:blip r:embed="rId2"/>
+          <a:stretch>
+            <a:fillRect/>
+          </a:stretch>
+        </p:blipFill>
+        <p:spPr>
+          <a:xfrm>
+            <a:off x="10957255" y="164592"/>
+            <a:ext cx="777240" cy="605859"/>
+          </a:xfrm>
+          <a:prstGeom prst="rect">
+            <a:avLst/>
+          </a:prstGeom>
+        </p:spPr>
+      </p:pic>
     </p:spTree>
   </p:cSld>
   <p:clrMapOvr>
@@ -6970,7 +7160,7 @@
       </p:sp>
       <p:pic>
         <p:nvPicPr>
-          <p:cNvPr id="3" name="Image 0" descr="/tmp/claude-0/-home-user-BasicRobotLessons/2acb544a-cfde-5b39-af16-8514142d362c/scratchpad/slides/v3-lesson0/assets/play_white.png">    </p:cNvPr>
+          <p:cNvPr id="3" name="Image 0" descr="/home/user/BasicRobotLessons/docs/presentations/v3/template/assets/icons/play_white.png">    </p:cNvPr>
           <p:cNvPicPr>
             <a:picLocks noChangeAspect="1"/>
           </p:cNvPicPr>
@@ -7040,7 +7230,7 @@
         <p:spPr>
           <a:xfrm>
             <a:off x="1371600" y="749808"/>
-            <a:ext cx="10058400" cy="594360"/>
+            <a:ext cx="9418320" cy="594360"/>
           </a:xfrm>
           <a:prstGeom prst="rect">
             <a:avLst/>
@@ -7505,7 +7695,7 @@
             <a:avLst/>
           </a:prstGeom>
           <a:solidFill>
-            <a:srgbClr val="1B9AAA"/>
+            <a:srgbClr val="FF5010"/>
           </a:solidFill>
           <a:ln/>
         </p:spPr>
@@ -7645,7 +7835,7 @@
             <a:avLst/>
           </a:prstGeom>
           <a:solidFill>
-            <a:srgbClr val="FF5010"/>
+            <a:srgbClr val="1B9AAA"/>
           </a:solidFill>
           <a:ln/>
         </p:spPr>
@@ -7779,7 +7969,7 @@
         <p:spPr>
           <a:xfrm>
             <a:off x="640080" y="6446520"/>
-            <a:ext cx="7315200" cy="365760"/>
+            <a:ext cx="8229600" cy="365760"/>
           </a:xfrm>
           <a:prstGeom prst="rect">
             <a:avLst/>
@@ -7803,7 +7993,7 @@
                 <a:ea typeface="Calibri" pitchFamily="34" charset="-122"/>
                 <a:cs typeface="Calibri" pitchFamily="34" charset="-120"/>
               </a:rPr>
-              <a:t>LESSON 0 · ORIENTATION · OPMODE TRACK</a:t>
+              <a:t>LEARN JAVA + ROBOT PROGRAMMING · ORIENTATION</a:t>
             </a:r>
             <a:endParaRPr lang="en-US" sz="2000" dirty="0"/>
           </a:p>
@@ -7848,6 +8038,30 @@
           </a:p>
         </p:txBody>
       </p:sp>
+      <p:pic>
+        <p:nvPicPr>
+          <p:cNvPr id="28" name="Image 1" descr="/home/user/BasicRobotLessons/docs/presentations/v3/template/assets/logo/team5010-logo.png">    </p:cNvPr>
+          <p:cNvPicPr>
+            <a:picLocks noChangeAspect="1"/>
+          </p:cNvPicPr>
+          <p:nvPr/>
+        </p:nvPicPr>
+        <p:blipFill>
+          <a:blip r:embed="rId2"/>
+          <a:stretch>
+            <a:fillRect/>
+          </a:stretch>
+        </p:blipFill>
+        <p:spPr>
+          <a:xfrm>
+            <a:off x="10957255" y="164592"/>
+            <a:ext cx="777240" cy="605859"/>
+          </a:xfrm>
+          <a:prstGeom prst="rect">
+            <a:avLst/>
+          </a:prstGeom>
+        </p:spPr>
+      </p:pic>
     </p:spTree>
   </p:cSld>
   <p:clrMapOvr>
@@ -7902,7 +8116,7 @@
       </p:sp>
       <p:pic>
         <p:nvPicPr>
-          <p:cNvPr id="3" name="Image 0" descr="/tmp/claude-0/-home-user-BasicRobotLessons/2acb544a-cfde-5b39-af16-8514142d362c/scratchpad/slides/v3-lesson0/assets/commentdots_white.png">    </p:cNvPr>
+          <p:cNvPr id="3" name="Image 0" descr="/home/user/BasicRobotLessons/docs/presentations/v3/template/assets/icons/commentdots_white.png">    </p:cNvPr>
           <p:cNvPicPr>
             <a:picLocks noChangeAspect="1"/>
           </p:cNvPicPr>
@@ -7972,7 +8186,7 @@
         <p:spPr>
           <a:xfrm>
             <a:off x="1371600" y="749808"/>
-            <a:ext cx="10058400" cy="594360"/>
+            <a:ext cx="9418320" cy="594360"/>
           </a:xfrm>
           <a:prstGeom prst="rect">
             <a:avLst/>
@@ -8588,7 +8802,7 @@
         <p:spPr>
           <a:xfrm>
             <a:off x="640080" y="6446520"/>
-            <a:ext cx="7315200" cy="365760"/>
+            <a:ext cx="8229600" cy="365760"/>
           </a:xfrm>
           <a:prstGeom prst="rect">
             <a:avLst/>
@@ -8612,7 +8826,7 @@
                 <a:ea typeface="Calibri" pitchFamily="34" charset="-122"/>
                 <a:cs typeface="Calibri" pitchFamily="34" charset="-120"/>
               </a:rPr>
-              <a:t>LESSON 0 · ORIENTATION · OPMODE TRACK</a:t>
+              <a:t>LEARN JAVA + ROBOT PROGRAMMING · ORIENTATION</a:t>
             </a:r>
             <a:endParaRPr lang="en-US" sz="2000" dirty="0"/>
           </a:p>
@@ -8657,6 +8871,30 @@
           </a:p>
         </p:txBody>
       </p:sp>
+      <p:pic>
+        <p:nvPicPr>
+          <p:cNvPr id="22" name="Image 1" descr="/home/user/BasicRobotLessons/docs/presentations/v3/template/assets/logo/team5010-logo.png">    </p:cNvPr>
+          <p:cNvPicPr>
+            <a:picLocks noChangeAspect="1"/>
+          </p:cNvPicPr>
+          <p:nvPr/>
+        </p:nvPicPr>
+        <p:blipFill>
+          <a:blip r:embed="rId2"/>
+          <a:stretch>
+            <a:fillRect/>
+          </a:stretch>
+        </p:blipFill>
+        <p:spPr>
+          <a:xfrm>
+            <a:off x="10957255" y="164592"/>
+            <a:ext cx="777240" cy="605859"/>
+          </a:xfrm>
+          <a:prstGeom prst="rect">
+            <a:avLst/>
+          </a:prstGeom>
+        </p:spPr>
+      </p:pic>
     </p:spTree>
   </p:cSld>
   <p:clrMapOvr>

--- a/docs/presentations/v3/00-orientation.pptx
+++ b/docs/presentations/v3/00-orientation.pptx
@@ -1767,7 +1767,7 @@
       </p:grpSpPr>
       <p:pic>
         <p:nvPicPr>
-          <p:cNvPr id="2" name="Image 0" descr="/home/user/BasicRobotLessons/docs/presentations/v3/template/assets/logo/team5010-logo.png">    </p:cNvPr>
+          <p:cNvPr id="2" name="Image 0" descr="/home/user/BasicRobotLessons/docs/presentations/v3/template/assets/logo/team5010-logo-onnavy.png">    </p:cNvPr>
           <p:cNvPicPr>
             <a:picLocks noChangeAspect="1"/>
           </p:cNvPicPr>
@@ -2537,7 +2537,7 @@
             <a:r>
               <a:rPr lang="en-US" sz="2000" spc="100" kern="0" dirty="0">
                 <a:solidFill>
-                  <a:srgbClr val="5B6B84"/>
+                  <a:srgbClr val="7A93B8"/>
                 </a:solidFill>
                 <a:latin typeface="Calibri" pitchFamily="34" charset="0"/>
                 <a:ea typeface="Calibri" pitchFamily="34" charset="-122"/>
@@ -2576,7 +2576,7 @@
             <a:r>
               <a:rPr lang="en-US" sz="2000" dirty="0">
                 <a:solidFill>
-                  <a:srgbClr val="5B6B84"/>
+                  <a:srgbClr val="7A93B8"/>
                 </a:solidFill>
                 <a:latin typeface="Calibri" pitchFamily="34" charset="0"/>
                 <a:ea typeface="Calibri" pitchFamily="34" charset="-122"/>
@@ -2590,7 +2590,7 @@
       </p:sp>
       <p:pic>
         <p:nvPicPr>
-          <p:cNvPr id="19" name="Image 1" descr="/home/user/BasicRobotLessons/docs/presentations/v3/template/assets/logo/team5010-logo.png">    </p:cNvPr>
+          <p:cNvPr id="19" name="Image 1" descr="/home/user/BasicRobotLessons/docs/presentations/v3/template/assets/logo/team5010-logo-onnavy.png">    </p:cNvPr>
           <p:cNvPicPr>
             <a:picLocks noChangeAspect="1"/>
           </p:cNvPicPr>
@@ -3207,7 +3207,7 @@
       </p:sp>
       <p:pic>
         <p:nvPicPr>
-          <p:cNvPr id="17" name="Image 2" descr="/home/user/BasicRobotLessons/docs/presentations/v3/template/assets/logo/team5010-logo.png">    </p:cNvPr>
+          <p:cNvPr id="17" name="Image 2" descr="/home/user/BasicRobotLessons/docs/presentations/v3/template/assets/logo/team5010-logo-onwhite.png">    </p:cNvPr>
           <p:cNvPicPr>
             <a:picLocks noChangeAspect="1"/>
           </p:cNvPicPr>
@@ -3881,7 +3881,7 @@
       </p:sp>
       <p:pic>
         <p:nvPicPr>
-          <p:cNvPr id="18" name="Image 3" descr="/home/user/BasicRobotLessons/docs/presentations/v3/template/assets/logo/team5010-logo.png">    </p:cNvPr>
+          <p:cNvPr id="18" name="Image 3" descr="/home/user/BasicRobotLessons/docs/presentations/v3/template/assets/logo/team5010-logo-onwhite.png">    </p:cNvPr>
           <p:cNvPicPr>
             <a:picLocks noChangeAspect="1"/>
           </p:cNvPicPr>
@@ -4687,7 +4687,7 @@
       </p:sp>
       <p:pic>
         <p:nvPicPr>
-          <p:cNvPr id="25" name="Image 5" descr="/home/user/BasicRobotLessons/docs/presentations/v3/template/assets/logo/team5010-logo.png">    </p:cNvPr>
+          <p:cNvPr id="25" name="Image 5" descr="/home/user/BasicRobotLessons/docs/presentations/v3/template/assets/logo/team5010-logo-onwhite.png">    </p:cNvPr>
           <p:cNvPicPr>
             <a:picLocks noChangeAspect="1"/>
           </p:cNvPicPr>
@@ -5261,7 +5261,7 @@
       </p:sp>
       <p:pic>
         <p:nvPicPr>
-          <p:cNvPr id="18" name="Image 1" descr="/home/user/BasicRobotLessons/docs/presentations/v3/template/assets/logo/team5010-logo.png">    </p:cNvPr>
+          <p:cNvPr id="18" name="Image 1" descr="/home/user/BasicRobotLessons/docs/presentations/v3/template/assets/logo/team5010-logo-onwhite.png">    </p:cNvPr>
           <p:cNvPicPr>
             <a:picLocks noChangeAspect="1"/>
           </p:cNvPicPr>
@@ -5942,7 +5942,7 @@
       </p:sp>
       <p:pic>
         <p:nvPicPr>
-          <p:cNvPr id="17" name="Image 1" descr="/home/user/BasicRobotLessons/docs/presentations/v3/template/assets/logo/team5010-logo.png">    </p:cNvPr>
+          <p:cNvPr id="17" name="Image 1" descr="/home/user/BasicRobotLessons/docs/presentations/v3/template/assets/logo/team5010-logo-onwhite.png">    </p:cNvPr>
           <p:cNvPicPr>
             <a:picLocks noChangeAspect="1"/>
           </p:cNvPicPr>
@@ -6580,7 +6580,7 @@
       </p:sp>
       <p:pic>
         <p:nvPicPr>
-          <p:cNvPr id="19" name="Image 2" descr="/home/user/BasicRobotLessons/docs/presentations/v3/template/assets/logo/team5010-logo.png">    </p:cNvPr>
+          <p:cNvPr id="19" name="Image 2" descr="/home/user/BasicRobotLessons/docs/presentations/v3/template/assets/logo/team5010-logo-onwhite.png">    </p:cNvPr>
           <p:cNvPicPr>
             <a:picLocks noChangeAspect="1"/>
           </p:cNvPicPr>
@@ -7031,7 +7031,7 @@
             <a:r>
               <a:rPr lang="en-US" sz="2000" spc="100" kern="0" dirty="0">
                 <a:solidFill>
-                  <a:srgbClr val="5B6B84"/>
+                  <a:srgbClr val="7A93B8"/>
                 </a:solidFill>
                 <a:latin typeface="Calibri" pitchFamily="34" charset="0"/>
                 <a:ea typeface="Calibri" pitchFamily="34" charset="-122"/>
@@ -7070,7 +7070,7 @@
             <a:r>
               <a:rPr lang="en-US" sz="2000" dirty="0">
                 <a:solidFill>
-                  <a:srgbClr val="5B6B84"/>
+                  <a:srgbClr val="7A93B8"/>
                 </a:solidFill>
                 <a:latin typeface="Calibri" pitchFamily="34" charset="0"/>
                 <a:ea typeface="Calibri" pitchFamily="34" charset="-122"/>
@@ -7084,7 +7084,7 @@
       </p:sp>
       <p:pic>
         <p:nvPicPr>
-          <p:cNvPr id="15" name="Image 1" descr="/home/user/BasicRobotLessons/docs/presentations/v3/template/assets/logo/team5010-logo.png">    </p:cNvPr>
+          <p:cNvPr id="15" name="Image 1" descr="/home/user/BasicRobotLessons/docs/presentations/v3/template/assets/logo/team5010-logo-onnavy.png">    </p:cNvPr>
           <p:cNvPicPr>
             <a:picLocks noChangeAspect="1"/>
           </p:cNvPicPr>
@@ -8040,7 +8040,7 @@
       </p:sp>
       <p:pic>
         <p:nvPicPr>
-          <p:cNvPr id="28" name="Image 1" descr="/home/user/BasicRobotLessons/docs/presentations/v3/template/assets/logo/team5010-logo.png">    </p:cNvPr>
+          <p:cNvPr id="28" name="Image 1" descr="/home/user/BasicRobotLessons/docs/presentations/v3/template/assets/logo/team5010-logo-onwhite.png">    </p:cNvPr>
           <p:cNvPicPr>
             <a:picLocks noChangeAspect="1"/>
           </p:cNvPicPr>
@@ -8873,7 +8873,7 @@
       </p:sp>
       <p:pic>
         <p:nvPicPr>
-          <p:cNvPr id="22" name="Image 1" descr="/home/user/BasicRobotLessons/docs/presentations/v3/template/assets/logo/team5010-logo.png">    </p:cNvPr>
+          <p:cNvPr id="22" name="Image 1" descr="/home/user/BasicRobotLessons/docs/presentations/v3/template/assets/logo/team5010-logo-onwhite.png">    </p:cNvPr>
           <p:cNvPicPr>
             <a:picLocks noChangeAspect="1"/>
           </p:cNvPicPr>

--- a/docs/presentations/v3/00-orientation.pptx
+++ b/docs/presentations/v3/00-orientation.pptx
@@ -2147,7 +2147,7 @@
         <p:spPr>
           <a:xfrm>
             <a:off x="1371600" y="1417320"/>
-            <a:ext cx="9875520" cy="640080"/>
+            <a:ext cx="9875520" cy="777240"/>
           </a:xfrm>
           <a:prstGeom prst="rect">
             <a:avLst/>
@@ -2210,8 +2210,8 @@
         </p:nvSpPr>
         <p:spPr>
           <a:xfrm>
-            <a:off x="960120" y="2514600"/>
-            <a:ext cx="502920" cy="502920"/>
+            <a:off x="960120" y="2468880"/>
+            <a:ext cx="457200" cy="457200"/>
           </a:xfrm>
           <a:prstGeom prst="ellipse">
             <a:avLst/>
@@ -2230,8 +2230,8 @@
         </p:nvSpPr>
         <p:spPr>
           <a:xfrm>
-            <a:off x="960120" y="2514600"/>
-            <a:ext cx="502920" cy="502920"/>
+            <a:off x="960120" y="2468880"/>
+            <a:ext cx="457200" cy="457200"/>
           </a:xfrm>
           <a:prstGeom prst="rect">
             <a:avLst/>
@@ -2269,17 +2269,17 @@
         </p:nvSpPr>
         <p:spPr>
           <a:xfrm>
-            <a:off x="960120" y="3200400"/>
-            <a:ext cx="4663440" cy="731520"/>
-          </a:xfrm>
-          <a:prstGeom prst="rect">
-            <a:avLst/>
-          </a:prstGeom>
-          <a:noFill/>
-          <a:ln/>
-        </p:spPr>
-        <p:txBody>
-          <a:bodyPr wrap="square" lIns="0" tIns="0" rIns="0" bIns="0" rtlCol="0" anchor="t"/>
+            <a:off x="1600200" y="2468880"/>
+            <a:ext cx="4023360" cy="457200"/>
+          </a:xfrm>
+          <a:prstGeom prst="rect">
+            <a:avLst/>
+          </a:prstGeom>
+          <a:noFill/>
+          <a:ln/>
+        </p:spPr>
+        <p:txBody>
+          <a:bodyPr wrap="square" lIns="0" tIns="0" rIns="0" bIns="0" rtlCol="0" anchor="ctr"/>
           <a:lstStyle/>
           <a:p>
             <a:pPr indent="0" marL="0">
@@ -2289,7 +2289,7 @@
               <a:buNone/>
             </a:pPr>
             <a:r>
-              <a:rPr lang="en-US" sz="2100" b="1" dirty="0">
+              <a:rPr lang="en-US" sz="2000" b="1" dirty="0">
                 <a:solidFill>
                   <a:srgbClr val="FFFFFF"/>
                 </a:solidFill>
@@ -2299,7 +2299,7 @@
               </a:rPr>
               <a:t>Give MyAuto a start()</a:t>
             </a:r>
-            <a:endParaRPr lang="en-US" sz="2100" dirty="0"/>
+            <a:endParaRPr lang="en-US" sz="2000" dirty="0"/>
           </a:p>
         </p:txBody>
       </p:sp>
@@ -2311,8 +2311,8 @@
         </p:nvSpPr>
         <p:spPr>
           <a:xfrm>
-            <a:off x="960120" y="3977640"/>
-            <a:ext cx="4663440" cy="1965960"/>
+            <a:off x="960120" y="3063240"/>
+            <a:ext cx="4663440" cy="2697480"/>
           </a:xfrm>
           <a:prstGeom prst="rect">
             <a:avLst/>
@@ -2326,7 +2326,7 @@
           <a:p>
             <a:pPr indent="0" marL="0">
               <a:lnSpc>
-                <a:spcPct val="120000"/>
+                <a:spcPct val="125000"/>
               </a:lnSpc>
               <a:buNone/>
             </a:pPr>
@@ -2375,8 +2375,8 @@
         </p:nvSpPr>
         <p:spPr>
           <a:xfrm>
-            <a:off x="6537960" y="2514600"/>
-            <a:ext cx="502920" cy="502920"/>
+            <a:off x="6537960" y="2468880"/>
+            <a:ext cx="457200" cy="457200"/>
           </a:xfrm>
           <a:prstGeom prst="ellipse">
             <a:avLst/>
@@ -2395,8 +2395,8 @@
         </p:nvSpPr>
         <p:spPr>
           <a:xfrm>
-            <a:off x="6537960" y="2514600"/>
-            <a:ext cx="502920" cy="502920"/>
+            <a:off x="6537960" y="2468880"/>
+            <a:ext cx="457200" cy="457200"/>
           </a:xfrm>
           <a:prstGeom prst="rect">
             <a:avLst/>
@@ -2434,17 +2434,17 @@
         </p:nvSpPr>
         <p:spPr>
           <a:xfrm>
-            <a:off x="6537960" y="3200400"/>
-            <a:ext cx="4663440" cy="731520"/>
-          </a:xfrm>
-          <a:prstGeom prst="rect">
-            <a:avLst/>
-          </a:prstGeom>
-          <a:noFill/>
-          <a:ln/>
-        </p:spPr>
-        <p:txBody>
-          <a:bodyPr wrap="square" lIns="0" tIns="0" rIns="0" bIns="0" rtlCol="0" anchor="t"/>
+            <a:off x="7178040" y="2468880"/>
+            <a:ext cx="4023360" cy="457200"/>
+          </a:xfrm>
+          <a:prstGeom prst="rect">
+            <a:avLst/>
+          </a:prstGeom>
+          <a:noFill/>
+          <a:ln/>
+        </p:spPr>
+        <p:txBody>
+          <a:bodyPr wrap="square" lIns="0" tIns="0" rIns="0" bIns="0" rtlCol="0" anchor="ctr"/>
           <a:lstStyle/>
           <a:p>
             <a:pPr indent="0" marL="0">
@@ -2454,7 +2454,7 @@
               <a:buNone/>
             </a:pPr>
             <a:r>
-              <a:rPr lang="en-US" sz="2100" b="1" dirty="0">
+              <a:rPr lang="en-US" sz="2000" b="1" dirty="0">
                 <a:solidFill>
                   <a:srgbClr val="FFFFFF"/>
                 </a:solidFill>
@@ -2464,7 +2464,7 @@
               </a:rPr>
               <a:t>Break it on purpose</a:t>
             </a:r>
-            <a:endParaRPr lang="en-US" sz="2100" dirty="0"/>
+            <a:endParaRPr lang="en-US" sz="2000" dirty="0"/>
           </a:p>
         </p:txBody>
       </p:sp>
@@ -2476,8 +2476,8 @@
         </p:nvSpPr>
         <p:spPr>
           <a:xfrm>
-            <a:off x="6537960" y="3977640"/>
-            <a:ext cx="4663440" cy="1965960"/>
+            <a:off x="6537960" y="3063240"/>
+            <a:ext cx="4663440" cy="2697480"/>
           </a:xfrm>
           <a:prstGeom prst="rect">
             <a:avLst/>
@@ -2491,7 +2491,7 @@
           <a:p>
             <a:pPr indent="0" marL="0">
               <a:lnSpc>
-                <a:spcPct val="120000"/>
+                <a:spcPct val="125000"/>
               </a:lnSpc>
               <a:buNone/>
             </a:pPr>
@@ -2775,7 +2775,7 @@
         <p:spPr>
           <a:xfrm>
             <a:off x="640080" y="1600200"/>
-            <a:ext cx="6309360" cy="3200400"/>
+            <a:ext cx="6309360" cy="3383280"/>
           </a:xfrm>
           <a:prstGeom prst="rect">
             <a:avLst/>
@@ -2868,7 +2868,7 @@
         </p:nvSpPr>
         <p:spPr>
           <a:xfrm>
-            <a:off x="640080" y="4937760"/>
+            <a:off x="640080" y="5074920"/>
             <a:ext cx="6309360" cy="1097280"/>
           </a:xfrm>
           <a:prstGeom prst="rect">
@@ -3413,8 +3413,8 @@
         </p:nvSpPr>
         <p:spPr>
           <a:xfrm>
-            <a:off x="960120" y="1783080"/>
-            <a:ext cx="10241280" cy="1234440"/>
+            <a:off x="960120" y="1737360"/>
+            <a:ext cx="10241280" cy="1371600"/>
           </a:xfrm>
           <a:prstGeom prst="rect">
             <a:avLst/>
@@ -4065,8 +4065,8 @@
         </p:nvSpPr>
         <p:spPr>
           <a:xfrm>
-            <a:off x="640080" y="1417320"/>
-            <a:ext cx="10881360" cy="777240"/>
+            <a:off x="640080" y="1371600"/>
+            <a:ext cx="10881360" cy="914400"/>
           </a:xfrm>
           <a:prstGeom prst="rect">
             <a:avLst/>

--- a/docs/presentations/v3/00-orientation.pptx
+++ b/docs/presentations/v3/00-orientation.pptx
@@ -4872,11 +4872,11 @@
         <p:spPr>
           <a:xfrm>
             <a:off x="640080" y="1600200"/>
-            <a:ext cx="5212080" cy="1737360"/>
+            <a:ext cx="5212080" cy="1920240"/>
           </a:xfrm>
           <a:prstGeom prst="roundRect">
             <a:avLst>
-              <a:gd name="adj" fmla="val 6316"/>
+              <a:gd name="adj" fmla="val 5714"/>
             </a:avLst>
           </a:prstGeom>
           <a:solidFill>
@@ -4960,8 +4960,47 @@
         </p:nvSpPr>
         <p:spPr>
           <a:xfrm>
-            <a:off x="914400" y="1801368"/>
-            <a:ext cx="4526280" cy="1371600"/>
+            <a:off x="914400" y="1728216"/>
+            <a:ext cx="4526280" cy="292608"/>
+          </a:xfrm>
+          <a:prstGeom prst="rect">
+            <a:avLst/>
+          </a:prstGeom>
+          <a:noFill/>
+          <a:ln/>
+        </p:spPr>
+        <p:txBody>
+          <a:bodyPr wrap="square" lIns="0" tIns="0" rIns="0" bIns="0" rtlCol="0" anchor="ctr"/>
+          <a:lstStyle/>
+          <a:p>
+            <a:pPr indent="0" marL="0">
+              <a:buNone/>
+            </a:pPr>
+            <a:r>
+              <a:rPr lang="en-US" sz="1500" i="1" dirty="0">
+                <a:solidFill>
+                  <a:srgbClr val="7FA8C9"/>
+                </a:solidFill>
+                <a:latin typeface="Calibri" pitchFamily="34" charset="0"/>
+                <a:ea typeface="Calibri" pitchFamily="34" charset="-122"/>
+                <a:cs typeface="Calibri" pitchFamily="34" charset="-120"/>
+              </a:rPr>
+              <a:t>Nothing to add — code you already have</a:t>
+            </a:r>
+            <a:endParaRPr lang="en-US" sz="1500" dirty="0"/>
+          </a:p>
+        </p:txBody>
+      </p:sp>
+      <p:sp>
+        <p:nvSpPr>
+          <p:cNvPr id="11" name="Text 8"/>
+          <p:cNvSpPr/>
+          <p:nvPr/>
+        </p:nvSpPr>
+        <p:spPr>
+          <a:xfrm>
+            <a:off x="914400" y="2057400"/>
+            <a:ext cx="4526280" cy="1261872"/>
           </a:xfrm>
           <a:prstGeom prst="rect">
             <a:avLst/>
@@ -4980,7 +5019,7 @@
               <a:buNone/>
             </a:pPr>
             <a:r>
-              <a:rPr lang="en-US" sz="2600" dirty="0">
+              <a:rPr lang="en-US" sz="2400" dirty="0">
                 <a:solidFill>
                   <a:srgbClr val="7FD1D9"/>
                 </a:solidFill>
@@ -4990,20 +5029,20 @@
               </a:rPr>
               <a:t>package first.robot;</a:t>
             </a:r>
-            <a:endParaRPr lang="en-US" sz="2600" dirty="0"/>
-          </a:p>
-        </p:txBody>
-      </p:sp>
-      <p:sp>
-        <p:nvSpPr>
-          <p:cNvPr id="11" name="Text 8"/>
-          <p:cNvSpPr/>
-          <p:nvPr/>
-        </p:nvSpPr>
-        <p:spPr>
-          <a:xfrm>
-            <a:off x="640080" y="3566160"/>
-            <a:ext cx="5212080" cy="2011680"/>
+            <a:endParaRPr lang="en-US" sz="2400" dirty="0"/>
+          </a:p>
+        </p:txBody>
+      </p:sp>
+      <p:sp>
+        <p:nvSpPr>
+          <p:cNvPr id="12" name="Text 9"/>
+          <p:cNvSpPr/>
+          <p:nvPr/>
+        </p:nvSpPr>
+        <p:spPr>
+          <a:xfrm>
+            <a:off x="640080" y="3703320"/>
+            <a:ext cx="5212080" cy="1874520"/>
           </a:xfrm>
           <a:prstGeom prst="rect">
             <a:avLst/>
@@ -5038,7 +5077,7 @@
       </p:sp>
       <p:sp>
         <p:nvSpPr>
-          <p:cNvPr id="12" name="Shape 9"/>
+          <p:cNvPr id="13" name="Shape 10"/>
           <p:cNvSpPr/>
           <p:nvPr/>
         </p:nvSpPr>
@@ -5060,7 +5099,7 @@
       </p:sp>
       <p:sp>
         <p:nvSpPr>
-          <p:cNvPr id="13" name="Text 10"/>
+          <p:cNvPr id="14" name="Text 11"/>
           <p:cNvSpPr/>
           <p:nvPr/>
         </p:nvSpPr>
@@ -5099,7 +5138,7 @@
       </p:sp>
       <p:sp>
         <p:nvSpPr>
-          <p:cNvPr id="14" name="Text 11"/>
+          <p:cNvPr id="15" name="Text 12"/>
           <p:cNvSpPr/>
           <p:nvPr/>
         </p:nvSpPr>
@@ -5141,7 +5180,7 @@
       </p:sp>
       <p:sp>
         <p:nvSpPr>
-          <p:cNvPr id="15" name="Text 12"/>
+          <p:cNvPr id="16" name="Text 13"/>
           <p:cNvSpPr/>
           <p:nvPr/>
         </p:nvSpPr>
@@ -5183,7 +5222,7 @@
       </p:sp>
       <p:sp>
         <p:nvSpPr>
-          <p:cNvPr id="16" name="Text 13"/>
+          <p:cNvPr id="17" name="Text 14"/>
           <p:cNvSpPr/>
           <p:nvPr/>
         </p:nvSpPr>
@@ -5222,7 +5261,7 @@
       </p:sp>
       <p:sp>
         <p:nvSpPr>
-          <p:cNvPr id="17" name="Text 14"/>
+          <p:cNvPr id="18" name="Text 15"/>
           <p:cNvSpPr/>
           <p:nvPr/>
         </p:nvSpPr>
@@ -5261,7 +5300,7 @@
       </p:sp>
       <p:pic>
         <p:nvPicPr>
-          <p:cNvPr id="18" name="Image 1" descr="/home/user/BasicRobotLessons/docs/presentations/v3/template/assets/logo/team5010-logo-onwhite.png">    </p:cNvPr>
+          <p:cNvPr id="19" name="Image 1" descr="/home/user/BasicRobotLessons/docs/presentations/v3/template/assets/logo/team5010-logo-onwhite.png">    </p:cNvPr>
           <p:cNvPicPr>
             <a:picLocks noChangeAspect="1"/>
           </p:cNvPicPr>
@@ -5446,11 +5485,11 @@
         <p:spPr>
           <a:xfrm>
             <a:off x="640080" y="1600200"/>
-            <a:ext cx="5760720" cy="3246120"/>
+            <a:ext cx="5760720" cy="3931920"/>
           </a:xfrm>
           <a:prstGeom prst="roundRect">
             <a:avLst>
-              <a:gd name="adj" fmla="val 3380"/>
+              <a:gd name="adj" fmla="val 2791"/>
             </a:avLst>
           </a:prstGeom>
           <a:solidFill>
@@ -5534,8 +5573,47 @@
         </p:nvSpPr>
         <p:spPr>
           <a:xfrm>
-            <a:off x="914400" y="1801368"/>
-            <a:ext cx="5074920" cy="2880360"/>
+            <a:off x="914400" y="1728216"/>
+            <a:ext cx="5074920" cy="292608"/>
+          </a:xfrm>
+          <a:prstGeom prst="rect">
+            <a:avLst/>
+          </a:prstGeom>
+          <a:noFill/>
+          <a:ln/>
+        </p:spPr>
+        <p:txBody>
+          <a:bodyPr wrap="square" lIns="0" tIns="0" rIns="0" bIns="0" rtlCol="0" anchor="ctr"/>
+          <a:lstStyle/>
+          <a:p>
+            <a:pPr indent="0" marL="0">
+              <a:buNone/>
+            </a:pPr>
+            <a:r>
+              <a:rPr lang="en-US" sz="1500" i="1" dirty="0">
+                <a:solidFill>
+                  <a:srgbClr val="7FA8C9"/>
+                </a:solidFill>
+                <a:latin typeface="Calibri" pitchFamily="34" charset="0"/>
+                <a:ea typeface="Calibri" pitchFamily="34" charset="-122"/>
+                <a:cs typeface="Calibri" pitchFamily="34" charset="-120"/>
+              </a:rPr>
+              <a:t>Nothing to add — code you already have</a:t>
+            </a:r>
+            <a:endParaRPr lang="en-US" sz="1500" dirty="0"/>
+          </a:p>
+        </p:txBody>
+      </p:sp>
+      <p:sp>
+        <p:nvSpPr>
+          <p:cNvPr id="11" name="Text 8"/>
+          <p:cNvSpPr/>
+          <p:nvPr/>
+        </p:nvSpPr>
+        <p:spPr>
+          <a:xfrm>
+            <a:off x="914400" y="2057400"/>
+            <a:ext cx="5074920" cy="3273552"/>
           </a:xfrm>
           <a:prstGeom prst="rect">
             <a:avLst/>
@@ -5554,7 +5632,7 @@
               <a:buNone/>
             </a:pPr>
             <a:r>
-              <a:rPr lang="en-US" sz="1900" dirty="0">
+              <a:rPr lang="en-US" sz="1700" dirty="0">
                 <a:solidFill>
                   <a:srgbClr val="FFD166"/>
                 </a:solidFill>
@@ -5564,7 +5642,7 @@
               </a:rPr>
               <a:t>@Override</a:t>
             </a:r>
-            <a:endParaRPr lang="en-US" sz="1900" dirty="0"/>
+            <a:endParaRPr lang="en-US" sz="1700" dirty="0"/>
           </a:p>
           <a:p>
             <a:pPr indent="0" marL="0">
@@ -5574,7 +5652,7 @@
               <a:buNone/>
             </a:pPr>
             <a:r>
-              <a:rPr lang="en-US" sz="1900" dirty="0">
+              <a:rPr lang="en-US" sz="1700" dirty="0">
                 <a:solidFill>
                   <a:srgbClr val="D7E3F4"/>
                 </a:solidFill>
@@ -5584,7 +5662,7 @@
               </a:rPr>
               <a:t>public void start() {</a:t>
             </a:r>
-            <a:endParaRPr lang="en-US" sz="1900" dirty="0"/>
+            <a:endParaRPr lang="en-US" sz="1700" dirty="0"/>
           </a:p>
           <a:p>
             <a:pPr indent="0" marL="0">
@@ -5594,7 +5672,7 @@
               <a:buNone/>
             </a:pPr>
             <a:r>
-              <a:rPr lang="en-US" sz="1900" dirty="0">
+              <a:rPr lang="en-US" sz="1700" dirty="0">
                 <a:solidFill>
                   <a:srgbClr val="7FA8C9"/>
                 </a:solidFill>
@@ -5604,7 +5682,7 @@
               </a:rPr>
               <a:t>  // once, when enabled</a:t>
             </a:r>
-            <a:endParaRPr lang="en-US" sz="1900" dirty="0"/>
+            <a:endParaRPr lang="en-US" sz="1700" dirty="0"/>
           </a:p>
           <a:p>
             <a:pPr indent="0" marL="0">
@@ -5614,7 +5692,7 @@
               <a:buNone/>
             </a:pPr>
             <a:r>
-              <a:rPr lang="en-US" sz="1900" dirty="0">
+              <a:rPr lang="en-US" sz="1700" dirty="0">
                 <a:solidFill>
                   <a:srgbClr val="D7E3F4"/>
                 </a:solidFill>
@@ -5624,7 +5702,7 @@
               </a:rPr>
               <a:t>}</a:t>
             </a:r>
-            <a:endParaRPr lang="en-US" sz="1900" dirty="0"/>
+            <a:endParaRPr lang="en-US" sz="1700" dirty="0"/>
           </a:p>
           <a:p>
             <a:pPr indent="0" marL="0">
@@ -5633,7 +5711,7 @@
               </a:lnSpc>
               <a:buNone/>
             </a:pPr>
-            <a:endParaRPr lang="en-US" sz="1900" dirty="0"/>
+            <a:endParaRPr lang="en-US" sz="1700" dirty="0"/>
           </a:p>
           <a:p>
             <a:pPr indent="0" marL="0">
@@ -5643,7 +5721,7 @@
               <a:buNone/>
             </a:pPr>
             <a:r>
-              <a:rPr lang="en-US" sz="1900" dirty="0">
+              <a:rPr lang="en-US" sz="1700" dirty="0">
                 <a:solidFill>
                   <a:srgbClr val="FFD166"/>
                 </a:solidFill>
@@ -5653,7 +5731,7 @@
               </a:rPr>
               <a:t>@Override</a:t>
             </a:r>
-            <a:endParaRPr lang="en-US" sz="1900" dirty="0"/>
+            <a:endParaRPr lang="en-US" sz="1700" dirty="0"/>
           </a:p>
           <a:p>
             <a:pPr indent="0" marL="0">
@@ -5663,7 +5741,7 @@
               <a:buNone/>
             </a:pPr>
             <a:r>
-              <a:rPr lang="en-US" sz="1900" dirty="0">
+              <a:rPr lang="en-US" sz="1700" dirty="0">
                 <a:solidFill>
                   <a:srgbClr val="D7E3F4"/>
                 </a:solidFill>
@@ -5673,7 +5751,7 @@
               </a:rPr>
               <a:t>public void periodic() {</a:t>
             </a:r>
-            <a:endParaRPr lang="en-US" sz="1900" dirty="0"/>
+            <a:endParaRPr lang="en-US" sz="1700" dirty="0"/>
           </a:p>
           <a:p>
             <a:pPr indent="0" marL="0">
@@ -5683,7 +5761,7 @@
               <a:buNone/>
             </a:pPr>
             <a:r>
-              <a:rPr lang="en-US" sz="1900" dirty="0">
+              <a:rPr lang="en-US" sz="1700" dirty="0">
                 <a:solidFill>
                   <a:srgbClr val="7FA8C9"/>
                 </a:solidFill>
@@ -5693,7 +5771,7 @@
               </a:rPr>
               <a:t>  // ~50x / sec, enabled</a:t>
             </a:r>
-            <a:endParaRPr lang="en-US" sz="1900" dirty="0"/>
+            <a:endParaRPr lang="en-US" sz="1700" dirty="0"/>
           </a:p>
           <a:p>
             <a:pPr indent="0" marL="0">
@@ -5703,7 +5781,7 @@
               <a:buNone/>
             </a:pPr>
             <a:r>
-              <a:rPr lang="en-US" sz="1900" dirty="0">
+              <a:rPr lang="en-US" sz="1700" dirty="0">
                 <a:solidFill>
                   <a:srgbClr val="D7E3F4"/>
                 </a:solidFill>
@@ -5713,13 +5791,13 @@
               </a:rPr>
               <a:t>}</a:t>
             </a:r>
-            <a:endParaRPr lang="en-US" sz="1900" dirty="0"/>
-          </a:p>
-        </p:txBody>
-      </p:sp>
-      <p:sp>
-        <p:nvSpPr>
-          <p:cNvPr id="11" name="Shape 8"/>
+            <a:endParaRPr lang="en-US" sz="1700" dirty="0"/>
+          </a:p>
+        </p:txBody>
+      </p:sp>
+      <p:sp>
+        <p:nvSpPr>
+          <p:cNvPr id="12" name="Shape 9"/>
           <p:cNvSpPr/>
           <p:nvPr/>
         </p:nvSpPr>
@@ -5741,7 +5819,7 @@
       </p:sp>
       <p:sp>
         <p:nvSpPr>
-          <p:cNvPr id="12" name="Text 9"/>
+          <p:cNvPr id="13" name="Text 10"/>
           <p:cNvSpPr/>
           <p:nvPr/>
         </p:nvSpPr>
@@ -5780,7 +5858,7 @@
       </p:sp>
       <p:sp>
         <p:nvSpPr>
-          <p:cNvPr id="13" name="Text 10"/>
+          <p:cNvPr id="14" name="Text 11"/>
           <p:cNvSpPr/>
           <p:nvPr/>
         </p:nvSpPr>
@@ -5822,7 +5900,7 @@
       </p:sp>
       <p:sp>
         <p:nvSpPr>
-          <p:cNvPr id="14" name="Text 11"/>
+          <p:cNvPr id="15" name="Text 12"/>
           <p:cNvSpPr/>
           <p:nvPr/>
         </p:nvSpPr>
@@ -5864,7 +5942,7 @@
       </p:sp>
       <p:sp>
         <p:nvSpPr>
-          <p:cNvPr id="15" name="Text 12"/>
+          <p:cNvPr id="16" name="Text 13"/>
           <p:cNvSpPr/>
           <p:nvPr/>
         </p:nvSpPr>
@@ -5903,7 +5981,7 @@
       </p:sp>
       <p:sp>
         <p:nvSpPr>
-          <p:cNvPr id="16" name="Text 13"/>
+          <p:cNvPr id="17" name="Text 14"/>
           <p:cNvSpPr/>
           <p:nvPr/>
         </p:nvSpPr>
@@ -5942,7 +6020,7 @@
       </p:sp>
       <p:pic>
         <p:nvPicPr>
-          <p:cNvPr id="17" name="Image 1" descr="/home/user/BasicRobotLessons/docs/presentations/v3/template/assets/logo/team5010-logo-onwhite.png">    </p:cNvPr>
+          <p:cNvPr id="18" name="Image 1" descr="/home/user/BasicRobotLessons/docs/presentations/v3/template/assets/logo/team5010-logo-onwhite.png">    </p:cNvPr>
           <p:cNvPicPr>
             <a:picLocks noChangeAspect="1"/>
           </p:cNvPicPr>
@@ -6127,11 +6205,11 @@
         <p:spPr>
           <a:xfrm>
             <a:off x="640080" y="1600200"/>
-            <a:ext cx="5394960" cy="1737360"/>
+            <a:ext cx="5394960" cy="1965960"/>
           </a:xfrm>
           <a:prstGeom prst="roundRect">
             <a:avLst>
-              <a:gd name="adj" fmla="val 6316"/>
+              <a:gd name="adj" fmla="val 5581"/>
             </a:avLst>
           </a:prstGeom>
           <a:solidFill>
@@ -6215,8 +6293,47 @@
         </p:nvSpPr>
         <p:spPr>
           <a:xfrm>
-            <a:off x="914400" y="1801368"/>
-            <a:ext cx="4709160" cy="1371600"/>
+            <a:off x="914400" y="1728216"/>
+            <a:ext cx="4709160" cy="292608"/>
+          </a:xfrm>
+          <a:prstGeom prst="rect">
+            <a:avLst/>
+          </a:prstGeom>
+          <a:noFill/>
+          <a:ln/>
+        </p:spPr>
+        <p:txBody>
+          <a:bodyPr wrap="square" lIns="0" tIns="0" rIns="0" bIns="0" rtlCol="0" anchor="ctr"/>
+          <a:lstStyle/>
+          <a:p>
+            <a:pPr indent="0" marL="0">
+              <a:buNone/>
+            </a:pPr>
+            <a:r>
+              <a:rPr lang="en-US" sz="1500" i="1" dirty="0">
+                <a:solidFill>
+                  <a:srgbClr val="7FA8C9"/>
+                </a:solidFill>
+                <a:latin typeface="Calibri" pitchFamily="34" charset="0"/>
+                <a:ea typeface="Calibri" pitchFamily="34" charset="-122"/>
+                <a:cs typeface="Calibri" pitchFamily="34" charset="-120"/>
+              </a:rPr>
+              <a:t>Nothing to add — code you already have</a:t>
+            </a:r>
+            <a:endParaRPr lang="en-US" sz="1500" dirty="0"/>
+          </a:p>
+        </p:txBody>
+      </p:sp>
+      <p:sp>
+        <p:nvSpPr>
+          <p:cNvPr id="11" name="Text 8"/>
+          <p:cNvSpPr/>
+          <p:nvPr/>
+        </p:nvSpPr>
+        <p:spPr>
+          <a:xfrm>
+            <a:off x="914400" y="2057400"/>
+            <a:ext cx="4709160" cy="1307592"/>
           </a:xfrm>
           <a:prstGeom prst="rect">
             <a:avLst/>
@@ -6235,7 +6352,7 @@
               <a:buNone/>
             </a:pPr>
             <a:r>
-              <a:rPr lang="en-US" sz="2000" dirty="0">
+              <a:rPr lang="en-US" sz="1800" dirty="0">
                 <a:solidFill>
                   <a:srgbClr val="FFD166"/>
                 </a:solidFill>
@@ -6245,7 +6362,7 @@
               </a:rPr>
               <a:t>@Teleop</a:t>
             </a:r>
-            <a:endParaRPr lang="en-US" sz="2000" dirty="0"/>
+            <a:endParaRPr lang="en-US" sz="1800" dirty="0"/>
           </a:p>
           <a:p>
             <a:pPr indent="0" marL="0">
@@ -6255,7 +6372,7 @@
               <a:buNone/>
             </a:pPr>
             <a:r>
-              <a:rPr lang="en-US" sz="2000" dirty="0">
+              <a:rPr lang="en-US" sz="1800" dirty="0">
                 <a:solidFill>
                   <a:srgbClr val="D7E3F4"/>
                 </a:solidFill>
@@ -6265,7 +6382,7 @@
               </a:rPr>
               <a:t>public class MyTeleop</a:t>
             </a:r>
-            <a:endParaRPr lang="en-US" sz="2000" dirty="0"/>
+            <a:endParaRPr lang="en-US" sz="1800" dirty="0"/>
           </a:p>
           <a:p>
             <a:pPr indent="0" marL="0">
@@ -6275,7 +6392,7 @@
               <a:buNone/>
             </a:pPr>
             <a:r>
-              <a:rPr lang="en-US" sz="2000" dirty="0">
+              <a:rPr lang="en-US" sz="1800" dirty="0">
                 <a:solidFill>
                   <a:srgbClr val="D7E3F4"/>
                 </a:solidFill>
@@ -6285,20 +6402,20 @@
               </a:rPr>
               <a:t>    extends PeriodicOpMode {</a:t>
             </a:r>
-            <a:endParaRPr lang="en-US" sz="2000" dirty="0"/>
-          </a:p>
-        </p:txBody>
-      </p:sp>
-      <p:sp>
-        <p:nvSpPr>
-          <p:cNvPr id="11" name="Text 8"/>
-          <p:cNvSpPr/>
-          <p:nvPr/>
-        </p:nvSpPr>
-        <p:spPr>
-          <a:xfrm>
-            <a:off x="640080" y="3566160"/>
-            <a:ext cx="5394960" cy="2011680"/>
+            <a:endParaRPr lang="en-US" sz="1800" dirty="0"/>
+          </a:p>
+        </p:txBody>
+      </p:sp>
+      <p:sp>
+        <p:nvSpPr>
+          <p:cNvPr id="12" name="Text 9"/>
+          <p:cNvSpPr/>
+          <p:nvPr/>
+        </p:nvSpPr>
+        <p:spPr>
+          <a:xfrm>
+            <a:off x="640080" y="3749040"/>
+            <a:ext cx="5394960" cy="1828800"/>
           </a:xfrm>
           <a:prstGeom prst="rect">
             <a:avLst/>
@@ -6333,7 +6450,7 @@
       </p:sp>
       <p:sp>
         <p:nvSpPr>
-          <p:cNvPr id="12" name="Shape 9"/>
+          <p:cNvPr id="13" name="Shape 10"/>
           <p:cNvSpPr/>
           <p:nvPr/>
         </p:nvSpPr>
@@ -6355,7 +6472,7 @@
       </p:sp>
       <p:pic>
         <p:nvPicPr>
-          <p:cNvPr id="13" name="Image 1" descr="/home/user/BasicRobotLessons/docs/presentations/v3/template/assets/icons/lightbulb_white.png">    </p:cNvPr>
+          <p:cNvPr id="14" name="Image 1" descr="/home/user/BasicRobotLessons/docs/presentations/v3/template/assets/icons/lightbulb_white.png">    </p:cNvPr>
           <p:cNvPicPr>
             <a:picLocks noChangeAspect="1"/>
           </p:cNvPicPr>
@@ -6379,7 +6496,7 @@
       </p:pic>
       <p:sp>
         <p:nvSpPr>
-          <p:cNvPr id="14" name="Text 10"/>
+          <p:cNvPr id="15" name="Text 11"/>
           <p:cNvSpPr/>
           <p:nvPr/>
         </p:nvSpPr>
@@ -6418,7 +6535,7 @@
       </p:sp>
       <p:sp>
         <p:nvSpPr>
-          <p:cNvPr id="15" name="Text 11"/>
+          <p:cNvPr id="16" name="Text 12"/>
           <p:cNvSpPr/>
           <p:nvPr/>
         </p:nvSpPr>
@@ -6460,7 +6577,7 @@
       </p:sp>
       <p:sp>
         <p:nvSpPr>
-          <p:cNvPr id="16" name="Text 12"/>
+          <p:cNvPr id="17" name="Text 13"/>
           <p:cNvSpPr/>
           <p:nvPr/>
         </p:nvSpPr>
@@ -6502,7 +6619,7 @@
       </p:sp>
       <p:sp>
         <p:nvSpPr>
-          <p:cNvPr id="17" name="Text 13"/>
+          <p:cNvPr id="18" name="Text 14"/>
           <p:cNvSpPr/>
           <p:nvPr/>
         </p:nvSpPr>
@@ -6541,7 +6658,7 @@
       </p:sp>
       <p:sp>
         <p:nvSpPr>
-          <p:cNvPr id="18" name="Text 14"/>
+          <p:cNvPr id="19" name="Text 15"/>
           <p:cNvSpPr/>
           <p:nvPr/>
         </p:nvSpPr>
@@ -6580,7 +6697,7 @@
       </p:sp>
       <p:pic>
         <p:nvPicPr>
-          <p:cNvPr id="19" name="Image 2" descr="/home/user/BasicRobotLessons/docs/presentations/v3/template/assets/logo/team5010-logo-onwhite.png">    </p:cNvPr>
+          <p:cNvPr id="20" name="Image 2" descr="/home/user/BasicRobotLessons/docs/presentations/v3/template/assets/logo/team5010-logo-onwhite.png">    </p:cNvPr>
           <p:cNvPicPr>
             <a:picLocks noChangeAspect="1"/>
           </p:cNvPicPr>
@@ -8225,11 +8342,11 @@
         <p:spPr>
           <a:xfrm>
             <a:off x="640080" y="1600200"/>
-            <a:ext cx="6492240" cy="2286000"/>
+            <a:ext cx="6492240" cy="2560320"/>
           </a:xfrm>
           <a:prstGeom prst="roundRect">
             <a:avLst>
-              <a:gd name="adj" fmla="val 4800"/>
+              <a:gd name="adj" fmla="val 4286"/>
             </a:avLst>
           </a:prstGeom>
           <a:solidFill>
@@ -8313,8 +8430,47 @@
         </p:nvSpPr>
         <p:spPr>
           <a:xfrm>
-            <a:off x="914400" y="1801368"/>
-            <a:ext cx="5806440" cy="1920240"/>
+            <a:off x="914400" y="1728216"/>
+            <a:ext cx="5806440" cy="292608"/>
+          </a:xfrm>
+          <a:prstGeom prst="rect">
+            <a:avLst/>
+          </a:prstGeom>
+          <a:noFill/>
+          <a:ln/>
+        </p:spPr>
+        <p:txBody>
+          <a:bodyPr wrap="square" lIns="0" tIns="0" rIns="0" bIns="0" rtlCol="0" anchor="ctr"/>
+          <a:lstStyle/>
+          <a:p>
+            <a:pPr indent="0" marL="0">
+              <a:buNone/>
+            </a:pPr>
+            <a:r>
+              <a:rPr lang="en-US" sz="1500" b="1" dirty="0">
+                <a:solidFill>
+                  <a:srgbClr val="FF5010"/>
+                </a:solidFill>
+                <a:latin typeface="Calibri" pitchFamily="34" charset="0"/>
+                <a:ea typeface="Calibri" pitchFamily="34" charset="-122"/>
+                <a:cs typeface="Calibri" pitchFamily="34" charset="-120"/>
+              </a:rPr>
+              <a:t>Back in MyTeleop.java, find start() and drop this in</a:t>
+            </a:r>
+            <a:endParaRPr lang="en-US" sz="1500" dirty="0"/>
+          </a:p>
+        </p:txBody>
+      </p:sp>
+      <p:sp>
+        <p:nvSpPr>
+          <p:cNvPr id="11" name="Text 8"/>
+          <p:cNvSpPr/>
+          <p:nvPr/>
+        </p:nvSpPr>
+        <p:spPr>
+          <a:xfrm>
+            <a:off x="914400" y="2057400"/>
+            <a:ext cx="5806440" cy="1901952"/>
           </a:xfrm>
           <a:prstGeom prst="rect">
             <a:avLst/>
@@ -8333,7 +8489,7 @@
               <a:buNone/>
             </a:pPr>
             <a:r>
-              <a:rPr lang="en-US" sz="1900" dirty="0">
+              <a:rPr lang="en-US" sz="1700" dirty="0">
                 <a:solidFill>
                   <a:srgbClr val="FFD166"/>
                 </a:solidFill>
@@ -8343,7 +8499,7 @@
               </a:rPr>
               <a:t>@Override</a:t>
             </a:r>
-            <a:endParaRPr lang="en-US" sz="1900" dirty="0"/>
+            <a:endParaRPr lang="en-US" sz="1700" dirty="0"/>
           </a:p>
           <a:p>
             <a:pPr indent="0" marL="0">
@@ -8353,7 +8509,7 @@
               <a:buNone/>
             </a:pPr>
             <a:r>
-              <a:rPr lang="en-US" sz="1900" dirty="0">
+              <a:rPr lang="en-US" sz="1700" dirty="0">
                 <a:solidFill>
                   <a:srgbClr val="D7E3F4"/>
                 </a:solidFill>
@@ -8363,7 +8519,7 @@
               </a:rPr>
               <a:t>public void start() {</a:t>
             </a:r>
-            <a:endParaRPr lang="en-US" sz="1900" dirty="0"/>
+            <a:endParaRPr lang="en-US" sz="1700" dirty="0"/>
           </a:p>
           <a:p>
             <a:pPr indent="0" marL="0">
@@ -8373,7 +8529,7 @@
               <a:buNone/>
             </a:pPr>
             <a:r>
-              <a:rPr lang="en-US" sz="1900" dirty="0">
+              <a:rPr lang="en-US" sz="1700" dirty="0">
                 <a:solidFill>
                   <a:srgbClr val="D7E3F4"/>
                 </a:solidFill>
@@ -8383,7 +8539,7 @@
               </a:rPr>
               <a:t>  System.out.println(</a:t>
             </a:r>
-            <a:endParaRPr lang="en-US" sz="1900" dirty="0"/>
+            <a:endParaRPr lang="en-US" sz="1700" dirty="0"/>
           </a:p>
           <a:p>
             <a:pPr indent="0" marL="0">
@@ -8393,7 +8549,7 @@
               <a:buNone/>
             </a:pPr>
             <a:r>
-              <a:rPr lang="en-US" sz="1900" dirty="0">
+              <a:rPr lang="en-US" sz="1700" dirty="0">
                 <a:solidFill>
                   <a:srgbClr val="9EF01A"/>
                 </a:solidFill>
@@ -8403,7 +8559,7 @@
               </a:rPr>
               <a:t>    "Hello from Team 5010! " +</a:t>
             </a:r>
-            <a:endParaRPr lang="en-US" sz="1900" dirty="0"/>
+            <a:endParaRPr lang="en-US" sz="1700" dirty="0"/>
           </a:p>
           <a:p>
             <a:pPr indent="0" marL="0">
@@ -8413,7 +8569,7 @@
               <a:buNone/>
             </a:pPr>
             <a:r>
-              <a:rPr lang="en-US" sz="1900" dirty="0">
+              <a:rPr lang="en-US" sz="1700" dirty="0">
                 <a:solidFill>
                   <a:srgbClr val="9EF01A"/>
                 </a:solidFill>
@@ -8423,7 +8579,7 @@
               </a:rPr>
               <a:t>    "Teleop started.");</a:t>
             </a:r>
-            <a:endParaRPr lang="en-US" sz="1900" dirty="0"/>
+            <a:endParaRPr lang="en-US" sz="1700" dirty="0"/>
           </a:p>
           <a:p>
             <a:pPr indent="0" marL="0">
@@ -8433,7 +8589,7 @@
               <a:buNone/>
             </a:pPr>
             <a:r>
-              <a:rPr lang="en-US" sz="1900" dirty="0">
+              <a:rPr lang="en-US" sz="1700" dirty="0">
                 <a:solidFill>
                   <a:srgbClr val="D7E3F4"/>
                 </a:solidFill>
@@ -8443,20 +8599,20 @@
               </a:rPr>
               <a:t>}</a:t>
             </a:r>
-            <a:endParaRPr lang="en-US" sz="1900" dirty="0"/>
-          </a:p>
-        </p:txBody>
-      </p:sp>
-      <p:sp>
-        <p:nvSpPr>
-          <p:cNvPr id="11" name="Text 8"/>
-          <p:cNvSpPr/>
-          <p:nvPr/>
-        </p:nvSpPr>
-        <p:spPr>
-          <a:xfrm>
-            <a:off x="640080" y="4069080"/>
-            <a:ext cx="6492240" cy="1737360"/>
+            <a:endParaRPr lang="en-US" sz="1700" dirty="0"/>
+          </a:p>
+        </p:txBody>
+      </p:sp>
+      <p:sp>
+        <p:nvSpPr>
+          <p:cNvPr id="12" name="Text 9"/>
+          <p:cNvSpPr/>
+          <p:nvPr/>
+        </p:nvSpPr>
+        <p:spPr>
+          <a:xfrm>
+            <a:off x="640080" y="4297680"/>
+            <a:ext cx="6492240" cy="1508760"/>
           </a:xfrm>
           <a:prstGeom prst="rect">
             <a:avLst/>
@@ -8491,7 +8647,7 @@
       </p:sp>
       <p:sp>
         <p:nvSpPr>
-          <p:cNvPr id="12" name="Shape 9"/>
+          <p:cNvPr id="13" name="Shape 10"/>
           <p:cNvSpPr/>
           <p:nvPr/>
         </p:nvSpPr>
@@ -8513,7 +8669,7 @@
       </p:sp>
       <p:sp>
         <p:nvSpPr>
-          <p:cNvPr id="13" name="Text 10"/>
+          <p:cNvPr id="14" name="Text 11"/>
           <p:cNvSpPr/>
           <p:nvPr/>
         </p:nvSpPr>
@@ -8552,7 +8708,7 @@
       </p:sp>
       <p:sp>
         <p:nvSpPr>
-          <p:cNvPr id="14" name="Text 11"/>
+          <p:cNvPr id="15" name="Text 12"/>
           <p:cNvSpPr/>
           <p:nvPr/>
         </p:nvSpPr>
@@ -8591,7 +8747,7 @@
       </p:sp>
       <p:sp>
         <p:nvSpPr>
-          <p:cNvPr id="15" name="Text 12"/>
+          <p:cNvPr id="16" name="Text 13"/>
           <p:cNvSpPr/>
           <p:nvPr/>
         </p:nvSpPr>
@@ -8633,7 +8789,7 @@
       </p:sp>
       <p:sp>
         <p:nvSpPr>
-          <p:cNvPr id="16" name="Text 13"/>
+          <p:cNvPr id="17" name="Text 14"/>
           <p:cNvSpPr/>
           <p:nvPr/>
         </p:nvSpPr>
@@ -8672,7 +8828,7 @@
       </p:sp>
       <p:sp>
         <p:nvSpPr>
-          <p:cNvPr id="17" name="Text 14"/>
+          <p:cNvPr id="18" name="Text 15"/>
           <p:cNvSpPr/>
           <p:nvPr/>
         </p:nvSpPr>
@@ -8714,7 +8870,7 @@
       </p:sp>
       <p:sp>
         <p:nvSpPr>
-          <p:cNvPr id="18" name="Text 15"/>
+          <p:cNvPr id="19" name="Text 16"/>
           <p:cNvSpPr/>
           <p:nvPr/>
         </p:nvSpPr>
@@ -8753,7 +8909,7 @@
       </p:sp>
       <p:sp>
         <p:nvSpPr>
-          <p:cNvPr id="19" name="Text 16"/>
+          <p:cNvPr id="20" name="Text 17"/>
           <p:cNvSpPr/>
           <p:nvPr/>
         </p:nvSpPr>
@@ -8795,7 +8951,7 @@
       </p:sp>
       <p:sp>
         <p:nvSpPr>
-          <p:cNvPr id="20" name="Text 17"/>
+          <p:cNvPr id="21" name="Text 18"/>
           <p:cNvSpPr/>
           <p:nvPr/>
         </p:nvSpPr>
@@ -8834,7 +8990,7 @@
       </p:sp>
       <p:sp>
         <p:nvSpPr>
-          <p:cNvPr id="21" name="Text 18"/>
+          <p:cNvPr id="22" name="Text 19"/>
           <p:cNvSpPr/>
           <p:nvPr/>
         </p:nvSpPr>
@@ -8873,7 +9029,7 @@
       </p:sp>
       <p:pic>
         <p:nvPicPr>
-          <p:cNvPr id="22" name="Image 1" descr="/home/user/BasicRobotLessons/docs/presentations/v3/template/assets/logo/team5010-logo-onwhite.png">    </p:cNvPr>
+          <p:cNvPr id="23" name="Image 1" descr="/home/user/BasicRobotLessons/docs/presentations/v3/template/assets/logo/team5010-logo-onwhite.png">    </p:cNvPr>
           <p:cNvPicPr>
             <a:picLocks noChangeAspect="1"/>
           </p:cNvPicPr>

--- a/docs/presentations/v3/00-orientation.pptx
+++ b/docs/presentations/v3/00-orientation.pptx
@@ -512,7 +512,7 @@
           <a:p>
             <a:r>
               <a:rPr lang="en-US" dirty="0"/>
-              <a:t/>
+              <a:t>The very first lesson — before this, students have a template project that builds but does nothing recognizable yet. Frame the whole lesson as three moves: understand the boot sequence, run it once with nothing changed, then make one real edit and watch the robot respond.</a:t>
             </a:r>
             <a:endParaRPr lang="en-US" dirty="0"/>
           </a:p>
@@ -600,7 +600,7 @@
           <a:p>
             <a:r>
               <a:rPr lang="en-US" dirty="0"/>
-              <a:t/>
+              <a:t>Don't let these get skipped — most of the actual learning happens when a student has to think, not when copying code out of the walkthrough. First, MyAuto.java doesn't have a start() method yet — add one matching MyTeleop's shape, print a different message, and confirm it only shows up when My Auto is picked, not My Teleop. Second, break it on purpose: delete a semicolon, run ./gradlew build, and read the error carefully — note the file and line number it names. Reading compiler errors is a real skill, and the sooner students are comfortable with them the better. Put the semicolon back when done.</a:t>
             </a:r>
             <a:endParaRPr lang="en-US" dirty="0"/>
           </a:p>
@@ -688,7 +688,7 @@
           <a:p>
             <a:r>
               <a:rPr lang="en-US" dirty="0"/>
-              <a:t/>
+              <a:t>A robot program here is a stack of classes in packages, same as always — but now some of those classes are opmodes, tagged with an annotation like @Teleop so the framework can find them and offer them by name on the Driver Station. Whichever opmode gets picked is the one whose periodic() starts ticking about 50 times a second — that's still the heartbeat everything else in this course hangs off, just with one more layer: which piece of code the heartbeat is driving is now a choice made at runtime, not baked into a single class. That's plenty for one sitting.</a:t>
             </a:r>
             <a:endParaRPr lang="en-US" dirty="0"/>
           </a:p>
@@ -776,7 +776,7 @@
           <a:p>
             <a:r>
               <a:rPr lang="en-US" dirty="0"/>
-              <a:t/>
+              <a:t>Get the template building in simulation, see how the pieces fit together, and make the first code change — printing a message the moment teleop wakes up. Half of what's on screen (Main.java, the annotation machinery) won't matter for a while, and that's fine to say out loud — the goal today is the picture, not full understanding of every file.</a:t>
             </a:r>
             <a:endParaRPr lang="en-US" dirty="0"/>
           </a:p>
@@ -864,7 +864,7 @@
           <a:p>
             <a:r>
               <a:rPr lang="en-US" dirty="0"/>
-              <a:t/>
+              <a:t>That's totally normal to find unfamiliar — half of it won't matter for a while. Read the comments once, let the picture settle (boot, then hand off to whichever opmode is picked), and keep going. Robot.java boots the framework and students will rarely touch it; MyTeleop.java and MyAuto.java are what the robot does when driven vs. left to run itself in autonomous.</a:t>
             </a:r>
             <a:endParaRPr lang="en-US" dirty="0"/>
           </a:p>
@@ -952,7 +952,7 @@
           <a:p>
             <a:r>
               <a:rPr lang="en-US" dirty="0"/>
-              <a:t/>
+              <a:t>That's a package declaration. Packages keep class names from colliding across libraries — if two vendors both shipped a Timer class, packages are how you'd tell them apart. Here the packages just mirror the folder structure: first.robot is the folder first/robot, opmodes live in first.robot.opmode. Below the package line, every file defines a class — a blueprint. Robot is the class the whole program boots from; MyTeleop and MyAuto are opmodes, and every mechanism or command written from Lesson 1 on gets its own class too.</a:t>
             </a:r>
             <a:endParaRPr lang="en-US" dirty="0"/>
           </a:p>
@@ -1040,7 +1040,7 @@
           <a:p>
             <a:r>
               <a:rPr lang="en-US" dirty="0"/>
-              <a:t/>
+              <a:t>Inside a class, the code that actually runs lives in methods — named blocks of code that do something. Five methods, all currently empty, each named after the moment it fires. The one to focus on today is periodic() — the others get met as they're needed. Like every method WPILib calls, you don't call periodic() yourself; the framework does, on its own schedule. @Override next to it means what it always will in this course: "yes, I know this method already has a meaning; I'm supplying my own."</a:t>
             </a:r>
             <a:endParaRPr lang="en-US" dirty="0"/>
           </a:p>
@@ -1128,7 +1128,7 @@
           <a:p>
             <a:r>
               <a:rPr lang="en-US" dirty="0"/>
-              <a:t/>
+              <a:t>@Teleop sitting above the whole class is a different kind of thing: an annotation — a tag that tells the framework something about the class underneath it, without being a method or a field itself. It says "this is a piece of robot behavior a human can pick on the Driver Station, and call it My Teleop unless told otherwise." MyAuto.java has the same idea with @Autonomous instead. Neither annotation runs any code by itself — it's a label the framework reads before the code ever executes. This is the biggest mental shift in the lesson, worth saying plainly: you don't write one robot program that runs top to bottom. You write several small ones — opmodes — and something else decides which one is running right now.</a:t>
             </a:r>
             <a:endParaRPr lang="en-US" dirty="0"/>
           </a:p>
@@ -1216,7 +1216,7 @@
           <a:p>
             <a:r>
               <a:rPr lang="en-US" dirty="0"/>
-              <a:t/>
+              <a:t>An opmode is a named, selectable chunk of robot behavior. MyTeleop and MyAuto are both opmodes, and a human picks one by name on the Driver Station before anything in it runs. Once picked and enabled, its periodic() method runs about 50 times a second, forever, until something else is picked or the robot disables. Each run is a tick — the heartbeat, same idea as always: a fast loop, ticking away, doing a little work each time. You never write while (true) yourself; the framework is the loop, and you plug things into it. If students take one thing from this lesson, it's this picture, with one layer added: which piece of code the framework is ticking depends on what's selected.</a:t>
             </a:r>
             <a:endParaRPr lang="en-US" dirty="0"/>
           </a:p>
@@ -1304,7 +1304,7 @@
           <a:p>
             <a:r>
               <a:rPr lang="en-US" dirty="0"/>
-              <a:t/>
+              <a:t>Either click the WPILib icon in VS Code's left sidebar (or Ctrl+Shift+P → WPILib: Simulate Robot Code), or run ./gradlew simulateJava from the project folder in PowerShell. The very first run downloads a pile of dependencies and can take several minutes — grab a drink, this is normal, not broken. When the build finishes, VS Code asks about Sim GUI vs. Real Driverstation — Sim GUI is correct for now. Nothing moves once enabled, because there's no motor yet — that's Lesson 1, worth saying so nobody thinks something's broken.</a:t>
             </a:r>
             <a:endParaRPr lang="en-US" dirty="0"/>
           </a:p>
@@ -1392,7 +1392,7 @@
           <a:p>
             <a:r>
               <a:rPr lang="en-US" dirty="0"/>
-              <a:t/>
+              <a:t>start() runs exactly once — the instant the opmode goes from disabled to enabled. That makes it a better home for a one-time message than periodic(), which would print the same line fifty times a second and flood the terminal. Three things worth naming in this one line: System.out.println(...) is a method call — asking a method to run and handing it something in the parentheses. The stuff in double quotes is a String, Java's word for a chunk of literal text. And the whole line ends in a semicolon — every statement in Java does, and forgetting it is the number-one beginner compile error, better met now than later. Run the simulator again, pick My Teleop, flip to Enabled, and the message should be sitting right there in the terminal — the robot just changed what it does.</a:t>
             </a:r>
             <a:endParaRPr lang="en-US" dirty="0"/>
           </a:p>
